--- a/docs/pptx/auc3/ritu-auc3-linsubhr-sens-aki2_10pct.pptx
+++ b/docs/pptx/auc3/ritu-auc3-linsubhr-sens-aki2_10pct.pptx
@@ -2443,7 +2443,7 @@
           </p:nvSpPr>
           <p:spPr>
             <a:xfrm>
-              <a:off x="1342929" y="2073503"/>
+              <a:off x="1343231" y="2073503"/>
               <a:ext cx="0" cy="3649639"/>
             </a:xfrm>
             <a:custGeom>
@@ -2486,7 +2486,7 @@
           </p:nvSpPr>
           <p:spPr>
             <a:xfrm>
-              <a:off x="2182565" y="2073503"/>
+              <a:off x="2181282" y="2073503"/>
               <a:ext cx="0" cy="3649639"/>
             </a:xfrm>
             <a:custGeom>
@@ -2529,7 +2529,7 @@
           </p:nvSpPr>
           <p:spPr>
             <a:xfrm>
-              <a:off x="3022201" y="2073503"/>
+              <a:off x="3019333" y="2073503"/>
               <a:ext cx="0" cy="3649639"/>
             </a:xfrm>
             <a:custGeom>
@@ -2572,7 +2572,7 @@
           </p:nvSpPr>
           <p:spPr>
             <a:xfrm>
-              <a:off x="3861838" y="2073503"/>
+              <a:off x="3857383" y="2073503"/>
               <a:ext cx="0" cy="3649639"/>
             </a:xfrm>
             <a:custGeom>
@@ -2615,7 +2615,7 @@
           </p:nvSpPr>
           <p:spPr>
             <a:xfrm>
-              <a:off x="4701474" y="2073503"/>
+              <a:off x="4695434" y="2073503"/>
               <a:ext cx="0" cy="3649639"/>
             </a:xfrm>
             <a:custGeom>
@@ -2658,7 +2658,7 @@
           </p:nvSpPr>
           <p:spPr>
             <a:xfrm>
-              <a:off x="5541110" y="2073503"/>
+              <a:off x="5533485" y="2073503"/>
               <a:ext cx="0" cy="3649639"/>
             </a:xfrm>
             <a:custGeom>
@@ -2701,7 +2701,7 @@
           </p:nvSpPr>
           <p:spPr>
             <a:xfrm>
-              <a:off x="6380746" y="2073503"/>
+              <a:off x="6371535" y="2073503"/>
               <a:ext cx="0" cy="3649639"/>
             </a:xfrm>
             <a:custGeom>
@@ -2744,7 +2744,7 @@
           </p:nvSpPr>
           <p:spPr>
             <a:xfrm>
-              <a:off x="7220382" y="2073503"/>
+              <a:off x="7209586" y="2073503"/>
               <a:ext cx="0" cy="3649639"/>
             </a:xfrm>
             <a:custGeom>
@@ -2787,7 +2787,7 @@
           </p:nvSpPr>
           <p:spPr>
             <a:xfrm>
-              <a:off x="8060018" y="2073503"/>
+              <a:off x="8047636" y="2073503"/>
               <a:ext cx="0" cy="3649639"/>
             </a:xfrm>
             <a:custGeom>
@@ -3045,7 +3045,7 @@
           </p:nvSpPr>
           <p:spPr>
             <a:xfrm>
-              <a:off x="923111" y="2073503"/>
+              <a:off x="924206" y="2073503"/>
               <a:ext cx="0" cy="3649639"/>
             </a:xfrm>
             <a:custGeom>
@@ -3088,7 +3088,7 @@
           </p:nvSpPr>
           <p:spPr>
             <a:xfrm>
-              <a:off x="1762747" y="2073503"/>
+              <a:off x="1762257" y="2073503"/>
               <a:ext cx="0" cy="3649639"/>
             </a:xfrm>
             <a:custGeom>
@@ -3131,7 +3131,7 @@
           </p:nvSpPr>
           <p:spPr>
             <a:xfrm>
-              <a:off x="2602383" y="2073503"/>
+              <a:off x="2600307" y="2073503"/>
               <a:ext cx="0" cy="3649639"/>
             </a:xfrm>
             <a:custGeom>
@@ -3174,7 +3174,7 @@
           </p:nvSpPr>
           <p:spPr>
             <a:xfrm>
-              <a:off x="3442019" y="2073503"/>
+              <a:off x="3438358" y="2073503"/>
               <a:ext cx="0" cy="3649639"/>
             </a:xfrm>
             <a:custGeom>
@@ -3217,7 +3217,7 @@
           </p:nvSpPr>
           <p:spPr>
             <a:xfrm>
-              <a:off x="4281656" y="2073503"/>
+              <a:off x="4276409" y="2073503"/>
               <a:ext cx="0" cy="3649639"/>
             </a:xfrm>
             <a:custGeom>
@@ -3260,7 +3260,7 @@
           </p:nvSpPr>
           <p:spPr>
             <a:xfrm>
-              <a:off x="5121292" y="2073503"/>
+              <a:off x="5114459" y="2073503"/>
               <a:ext cx="0" cy="3649639"/>
             </a:xfrm>
             <a:custGeom>
@@ -3303,7 +3303,7 @@
           </p:nvSpPr>
           <p:spPr>
             <a:xfrm>
-              <a:off x="5960928" y="2073503"/>
+              <a:off x="5952510" y="2073503"/>
               <a:ext cx="0" cy="3649639"/>
             </a:xfrm>
             <a:custGeom>
@@ -3346,7 +3346,7 @@
           </p:nvSpPr>
           <p:spPr>
             <a:xfrm>
-              <a:off x="6800564" y="2073503"/>
+              <a:off x="6790560" y="2073503"/>
               <a:ext cx="0" cy="3649639"/>
             </a:xfrm>
             <a:custGeom>
@@ -3389,7 +3389,7 @@
           </p:nvSpPr>
           <p:spPr>
             <a:xfrm>
-              <a:off x="7640200" y="2073503"/>
+              <a:off x="7628611" y="2073503"/>
               <a:ext cx="0" cy="3649639"/>
             </a:xfrm>
             <a:custGeom>
@@ -3432,7 +3432,7 @@
           </p:nvSpPr>
           <p:spPr>
             <a:xfrm>
-              <a:off x="8479836" y="2073503"/>
+              <a:off x="8466662" y="2073503"/>
               <a:ext cx="0" cy="3649639"/>
             </a:xfrm>
             <a:custGeom>
@@ -3476,506 +3476,503 @@
           <p:spPr>
             <a:xfrm>
               <a:off x="1172049" y="2073503"/>
-              <a:ext cx="7090630" cy="3483543"/>
+              <a:ext cx="7090630" cy="3483537"/>
             </a:xfrm>
             <a:custGeom>
               <a:avLst/>
               <a:pathLst>
-                <a:path w="7090630" h="3483543">
+                <a:path w="7090630" h="3483537">
                   <a:moveTo>
-                    <a:pt x="2564349" y="0"/>
+                    <a:pt x="2587079" y="0"/>
                   </a:moveTo>
                   <a:lnTo>
-                    <a:pt x="2578410" y="110438"/>
-                  </a:lnTo>
-                  <a:lnTo>
-                    <a:pt x="2650033" y="592571"/>
-                  </a:lnTo>
-                  <a:lnTo>
-                    <a:pt x="2721655" y="1005794"/>
-                  </a:lnTo>
-                  <a:lnTo>
-                    <a:pt x="2793278" y="1359957"/>
-                  </a:lnTo>
-                  <a:lnTo>
-                    <a:pt x="2864901" y="1663501"/>
-                  </a:lnTo>
-                  <a:lnTo>
-                    <a:pt x="2936523" y="1923661"/>
-                  </a:lnTo>
-                  <a:lnTo>
-                    <a:pt x="3008146" y="2146638"/>
-                  </a:lnTo>
-                  <a:lnTo>
-                    <a:pt x="3079768" y="2337745"/>
-                  </a:lnTo>
-                  <a:lnTo>
-                    <a:pt x="3151391" y="2501538"/>
-                  </a:lnTo>
-                  <a:lnTo>
-                    <a:pt x="3223013" y="2641921"/>
-                  </a:lnTo>
-                  <a:lnTo>
-                    <a:pt x="3294636" y="2654551"/>
-                  </a:lnTo>
-                  <a:lnTo>
-                    <a:pt x="3366258" y="2654848"/>
-                  </a:lnTo>
-                  <a:lnTo>
-                    <a:pt x="3437881" y="2655144"/>
-                  </a:lnTo>
-                  <a:lnTo>
-                    <a:pt x="3509503" y="2655440"/>
-                  </a:lnTo>
-                  <a:lnTo>
-                    <a:pt x="3581126" y="2655737"/>
-                  </a:lnTo>
-                  <a:lnTo>
-                    <a:pt x="3652748" y="2656033"/>
-                  </a:lnTo>
-                  <a:lnTo>
-                    <a:pt x="3724371" y="2656329"/>
-                  </a:lnTo>
-                  <a:lnTo>
-                    <a:pt x="3795993" y="2656625"/>
-                  </a:lnTo>
-                  <a:lnTo>
-                    <a:pt x="3867616" y="2656920"/>
-                  </a:lnTo>
-                  <a:lnTo>
-                    <a:pt x="3939238" y="2657216"/>
-                  </a:lnTo>
-                  <a:lnTo>
-                    <a:pt x="4010861" y="2657512"/>
-                  </a:lnTo>
-                  <a:lnTo>
-                    <a:pt x="4082483" y="2657807"/>
-                  </a:lnTo>
-                  <a:lnTo>
-                    <a:pt x="4154106" y="2658103"/>
-                  </a:lnTo>
-                  <a:lnTo>
-                    <a:pt x="4225729" y="2658398"/>
-                  </a:lnTo>
-                  <a:lnTo>
-                    <a:pt x="4297351" y="2658693"/>
-                  </a:lnTo>
-                  <a:lnTo>
-                    <a:pt x="4368974" y="2658988"/>
-                  </a:lnTo>
-                  <a:lnTo>
-                    <a:pt x="4440596" y="2659283"/>
-                  </a:lnTo>
-                  <a:lnTo>
-                    <a:pt x="4512219" y="2659578"/>
-                  </a:lnTo>
-                  <a:lnTo>
-                    <a:pt x="4583841" y="2659873"/>
-                  </a:lnTo>
-                  <a:lnTo>
-                    <a:pt x="4655464" y="2660167"/>
-                  </a:lnTo>
-                  <a:lnTo>
-                    <a:pt x="4727086" y="2660462"/>
-                  </a:lnTo>
-                  <a:lnTo>
-                    <a:pt x="4798709" y="2660756"/>
-                  </a:lnTo>
-                  <a:lnTo>
-                    <a:pt x="4870331" y="2661051"/>
-                  </a:lnTo>
-                  <a:lnTo>
-                    <a:pt x="4941954" y="2661345"/>
-                  </a:lnTo>
-                  <a:lnTo>
-                    <a:pt x="5013576" y="2661639"/>
-                  </a:lnTo>
-                  <a:lnTo>
-                    <a:pt x="5085199" y="2661933"/>
-                  </a:lnTo>
-                  <a:lnTo>
-                    <a:pt x="5156821" y="2662227"/>
-                  </a:lnTo>
-                  <a:lnTo>
-                    <a:pt x="5228444" y="2662521"/>
-                  </a:lnTo>
-                  <a:lnTo>
-                    <a:pt x="5300066" y="2662815"/>
-                  </a:lnTo>
-                  <a:lnTo>
-                    <a:pt x="5371689" y="2663108"/>
-                  </a:lnTo>
-                  <a:lnTo>
-                    <a:pt x="5443311" y="2663402"/>
-                  </a:lnTo>
-                  <a:lnTo>
-                    <a:pt x="5514934" y="2663695"/>
-                  </a:lnTo>
-                  <a:lnTo>
-                    <a:pt x="5586557" y="2663988"/>
-                  </a:lnTo>
-                  <a:lnTo>
-                    <a:pt x="5658179" y="2664281"/>
-                  </a:lnTo>
-                  <a:lnTo>
-                    <a:pt x="5729802" y="2664574"/>
-                  </a:lnTo>
-                  <a:lnTo>
-                    <a:pt x="5801424" y="2664867"/>
-                  </a:lnTo>
-                  <a:lnTo>
-                    <a:pt x="5873047" y="2665160"/>
-                  </a:lnTo>
-                  <a:lnTo>
-                    <a:pt x="5944669" y="2665453"/>
-                  </a:lnTo>
-                  <a:lnTo>
-                    <a:pt x="6016292" y="2665746"/>
-                  </a:lnTo>
-                  <a:lnTo>
-                    <a:pt x="6087914" y="2666038"/>
-                  </a:lnTo>
-                  <a:lnTo>
-                    <a:pt x="6159537" y="2666331"/>
-                  </a:lnTo>
-                  <a:lnTo>
-                    <a:pt x="6231159" y="2666623"/>
-                  </a:lnTo>
-                  <a:lnTo>
-                    <a:pt x="6302782" y="2666915"/>
-                  </a:lnTo>
-                  <a:lnTo>
-                    <a:pt x="6374404" y="2667207"/>
-                  </a:lnTo>
-                  <a:lnTo>
-                    <a:pt x="6446027" y="2667499"/>
-                  </a:lnTo>
-                  <a:lnTo>
-                    <a:pt x="6517649" y="2667791"/>
-                  </a:lnTo>
-                  <a:lnTo>
-                    <a:pt x="6589272" y="2668083"/>
-                  </a:lnTo>
-                  <a:lnTo>
-                    <a:pt x="6660894" y="2668375"/>
-                  </a:lnTo>
-                  <a:lnTo>
-                    <a:pt x="6732517" y="2668666"/>
-                  </a:lnTo>
-                  <a:lnTo>
-                    <a:pt x="6804139" y="2668958"/>
-                  </a:lnTo>
-                  <a:lnTo>
-                    <a:pt x="6875762" y="2669249"/>
-                  </a:lnTo>
-                  <a:lnTo>
-                    <a:pt x="6947385" y="2669541"/>
-                  </a:lnTo>
-                  <a:lnTo>
-                    <a:pt x="7019007" y="2669832"/>
-                  </a:lnTo>
-                  <a:lnTo>
-                    <a:pt x="7090630" y="2670123"/>
-                  </a:lnTo>
-                  <a:lnTo>
-                    <a:pt x="7090630" y="3483543"/>
-                  </a:lnTo>
-                  <a:lnTo>
-                    <a:pt x="7019007" y="3483509"/>
-                  </a:lnTo>
-                  <a:lnTo>
-                    <a:pt x="6947385" y="3483470"/>
-                  </a:lnTo>
-                  <a:lnTo>
-                    <a:pt x="6875762" y="3483423"/>
-                  </a:lnTo>
-                  <a:lnTo>
-                    <a:pt x="6804139" y="3483370"/>
-                  </a:lnTo>
-                  <a:lnTo>
-                    <a:pt x="6732517" y="3483307"/>
-                  </a:lnTo>
-                  <a:lnTo>
-                    <a:pt x="6660894" y="3483233"/>
-                  </a:lnTo>
-                  <a:lnTo>
-                    <a:pt x="6589272" y="3483148"/>
-                  </a:lnTo>
-                  <a:lnTo>
-                    <a:pt x="6517649" y="3483048"/>
-                  </a:lnTo>
-                  <a:lnTo>
-                    <a:pt x="6446027" y="3482932"/>
-                  </a:lnTo>
-                  <a:lnTo>
-                    <a:pt x="6374404" y="3482796"/>
-                  </a:lnTo>
-                  <a:lnTo>
-                    <a:pt x="6302782" y="3482637"/>
-                  </a:lnTo>
-                  <a:lnTo>
-                    <a:pt x="6231159" y="3482452"/>
-                  </a:lnTo>
-                  <a:lnTo>
-                    <a:pt x="6159537" y="3482236"/>
-                  </a:lnTo>
-                  <a:lnTo>
-                    <a:pt x="6087914" y="3481985"/>
-                  </a:lnTo>
-                  <a:lnTo>
-                    <a:pt x="6016292" y="3481691"/>
-                  </a:lnTo>
-                  <a:lnTo>
-                    <a:pt x="5944669" y="3481348"/>
-                  </a:lnTo>
-                  <a:lnTo>
-                    <a:pt x="5873047" y="3480948"/>
-                  </a:lnTo>
-                  <a:lnTo>
-                    <a:pt x="5801424" y="3480481"/>
-                  </a:lnTo>
-                  <a:lnTo>
-                    <a:pt x="5729802" y="3479937"/>
-                  </a:lnTo>
-                  <a:lnTo>
-                    <a:pt x="5658179" y="3479302"/>
-                  </a:lnTo>
-                  <a:lnTo>
-                    <a:pt x="5586557" y="3478560"/>
-                  </a:lnTo>
-                  <a:lnTo>
-                    <a:pt x="5514934" y="3477696"/>
-                  </a:lnTo>
-                  <a:lnTo>
-                    <a:pt x="5443311" y="3476687"/>
-                  </a:lnTo>
-                  <a:lnTo>
-                    <a:pt x="5371689" y="3475509"/>
-                  </a:lnTo>
-                  <a:lnTo>
-                    <a:pt x="5300066" y="3474136"/>
-                  </a:lnTo>
-                  <a:lnTo>
-                    <a:pt x="5228444" y="3472533"/>
-                  </a:lnTo>
-                  <a:lnTo>
-                    <a:pt x="5156821" y="3470663"/>
-                  </a:lnTo>
-                  <a:lnTo>
-                    <a:pt x="5085199" y="3468481"/>
-                  </a:lnTo>
-                  <a:lnTo>
-                    <a:pt x="5013576" y="3465936"/>
-                  </a:lnTo>
-                  <a:lnTo>
-                    <a:pt x="4941954" y="3462965"/>
-                  </a:lnTo>
-                  <a:lnTo>
-                    <a:pt x="4870331" y="3459500"/>
-                  </a:lnTo>
-                  <a:lnTo>
-                    <a:pt x="4798709" y="3455457"/>
-                  </a:lnTo>
-                  <a:lnTo>
-                    <a:pt x="4727086" y="3450739"/>
-                  </a:lnTo>
-                  <a:lnTo>
-                    <a:pt x="4655464" y="3445235"/>
-                  </a:lnTo>
-                  <a:lnTo>
-                    <a:pt x="4583841" y="3438813"/>
-                  </a:lnTo>
-                  <a:lnTo>
-                    <a:pt x="4512219" y="3431319"/>
-                  </a:lnTo>
-                  <a:lnTo>
-                    <a:pt x="4440596" y="3422577"/>
-                  </a:lnTo>
-                  <a:lnTo>
-                    <a:pt x="4368974" y="3412376"/>
-                  </a:lnTo>
-                  <a:lnTo>
-                    <a:pt x="4297351" y="3400474"/>
-                  </a:lnTo>
-                  <a:lnTo>
-                    <a:pt x="4225729" y="3386588"/>
-                  </a:lnTo>
-                  <a:lnTo>
-                    <a:pt x="4154106" y="3370386"/>
-                  </a:lnTo>
-                  <a:lnTo>
-                    <a:pt x="4082483" y="3351482"/>
-                  </a:lnTo>
-                  <a:lnTo>
-                    <a:pt x="4010861" y="3329425"/>
-                  </a:lnTo>
-                  <a:lnTo>
-                    <a:pt x="3939238" y="3303691"/>
-                  </a:lnTo>
-                  <a:lnTo>
-                    <a:pt x="3867616" y="3273665"/>
-                  </a:lnTo>
-                  <a:lnTo>
-                    <a:pt x="3795993" y="3238631"/>
-                  </a:lnTo>
-                  <a:lnTo>
-                    <a:pt x="3724371" y="3197756"/>
-                  </a:lnTo>
-                  <a:lnTo>
-                    <a:pt x="3652748" y="3150064"/>
-                  </a:lnTo>
-                  <a:lnTo>
-                    <a:pt x="3581126" y="3094420"/>
-                  </a:lnTo>
-                  <a:lnTo>
-                    <a:pt x="3509503" y="3029495"/>
-                  </a:lnTo>
-                  <a:lnTo>
-                    <a:pt x="3437881" y="2953744"/>
-                  </a:lnTo>
-                  <a:lnTo>
-                    <a:pt x="3366258" y="2865361"/>
-                  </a:lnTo>
-                  <a:lnTo>
-                    <a:pt x="3294636" y="2762239"/>
-                  </a:lnTo>
-                  <a:lnTo>
-                    <a:pt x="3223013" y="2654254"/>
-                  </a:lnTo>
-                  <a:lnTo>
-                    <a:pt x="3151391" y="2653958"/>
-                  </a:lnTo>
-                  <a:lnTo>
-                    <a:pt x="3079768" y="2653661"/>
-                  </a:lnTo>
-                  <a:lnTo>
-                    <a:pt x="3008146" y="2653364"/>
-                  </a:lnTo>
-                  <a:lnTo>
-                    <a:pt x="2936523" y="2653067"/>
-                  </a:lnTo>
-                  <a:lnTo>
-                    <a:pt x="2864901" y="2652770"/>
-                  </a:lnTo>
-                  <a:lnTo>
-                    <a:pt x="2793278" y="2652472"/>
-                  </a:lnTo>
-                  <a:lnTo>
-                    <a:pt x="2721655" y="2652175"/>
-                  </a:lnTo>
-                  <a:lnTo>
-                    <a:pt x="2650033" y="2651877"/>
-                  </a:lnTo>
-                  <a:lnTo>
-                    <a:pt x="2578410" y="2651580"/>
-                  </a:lnTo>
-                  <a:lnTo>
-                    <a:pt x="2506788" y="2651282"/>
-                  </a:lnTo>
-                  <a:lnTo>
-                    <a:pt x="2435165" y="2650984"/>
-                  </a:lnTo>
-                  <a:lnTo>
-                    <a:pt x="2363543" y="2650686"/>
-                  </a:lnTo>
-                  <a:lnTo>
-                    <a:pt x="2291920" y="2650388"/>
-                  </a:lnTo>
-                  <a:lnTo>
-                    <a:pt x="2220298" y="2650090"/>
-                  </a:lnTo>
-                  <a:lnTo>
-                    <a:pt x="2148675" y="2649792"/>
-                  </a:lnTo>
-                  <a:lnTo>
-                    <a:pt x="2077053" y="2649493"/>
-                  </a:lnTo>
-                  <a:lnTo>
-                    <a:pt x="2005430" y="2649195"/>
-                  </a:lnTo>
-                  <a:lnTo>
-                    <a:pt x="1933808" y="2648896"/>
-                  </a:lnTo>
-                  <a:lnTo>
-                    <a:pt x="1862185" y="2648598"/>
-                  </a:lnTo>
-                  <a:lnTo>
-                    <a:pt x="1790563" y="2648299"/>
-                  </a:lnTo>
-                  <a:lnTo>
-                    <a:pt x="1718940" y="2648000"/>
-                  </a:lnTo>
-                  <a:lnTo>
-                    <a:pt x="1647318" y="2647701"/>
-                  </a:lnTo>
-                  <a:lnTo>
-                    <a:pt x="1575695" y="2647402"/>
-                  </a:lnTo>
-                  <a:lnTo>
-                    <a:pt x="1504073" y="2647103"/>
-                  </a:lnTo>
-                  <a:lnTo>
-                    <a:pt x="1432450" y="2646803"/>
-                  </a:lnTo>
-                  <a:lnTo>
-                    <a:pt x="1360827" y="2646504"/>
-                  </a:lnTo>
-                  <a:lnTo>
-                    <a:pt x="1289205" y="2646204"/>
-                  </a:lnTo>
-                  <a:lnTo>
-                    <a:pt x="1217582" y="2645905"/>
-                  </a:lnTo>
-                  <a:lnTo>
-                    <a:pt x="1145960" y="2645605"/>
-                  </a:lnTo>
-                  <a:lnTo>
-                    <a:pt x="1074337" y="2645305"/>
-                  </a:lnTo>
-                  <a:lnTo>
-                    <a:pt x="1002715" y="2645005"/>
-                  </a:lnTo>
-                  <a:lnTo>
-                    <a:pt x="931092" y="2644705"/>
-                  </a:lnTo>
-                  <a:lnTo>
-                    <a:pt x="859470" y="2644405"/>
-                  </a:lnTo>
-                  <a:lnTo>
-                    <a:pt x="787847" y="2644105"/>
-                  </a:lnTo>
-                  <a:lnTo>
-                    <a:pt x="716225" y="2643804"/>
-                  </a:lnTo>
-                  <a:lnTo>
-                    <a:pt x="644602" y="2643504"/>
-                  </a:lnTo>
-                  <a:lnTo>
-                    <a:pt x="572980" y="2643203"/>
-                  </a:lnTo>
-                  <a:lnTo>
-                    <a:pt x="501357" y="2642902"/>
-                  </a:lnTo>
-                  <a:lnTo>
-                    <a:pt x="429735" y="2642602"/>
-                  </a:lnTo>
-                  <a:lnTo>
-                    <a:pt x="358112" y="2642301"/>
-                  </a:lnTo>
-                  <a:lnTo>
-                    <a:pt x="286490" y="2642000"/>
-                  </a:lnTo>
-                  <a:lnTo>
-                    <a:pt x="214867" y="2641699"/>
-                  </a:lnTo>
-                  <a:lnTo>
-                    <a:pt x="143245" y="2641397"/>
-                  </a:lnTo>
-                  <a:lnTo>
-                    <a:pt x="71622" y="2641096"/>
-                  </a:lnTo>
-                  <a:lnTo>
-                    <a:pt x="0" y="2640794"/>
+                    <a:pt x="2650033" y="446152"/>
+                  </a:lnTo>
+                  <a:lnTo>
+                    <a:pt x="2721655" y="881062"/>
+                  </a:lnTo>
+                  <a:lnTo>
+                    <a:pt x="2793278" y="1253704"/>
+                  </a:lnTo>
+                  <a:lnTo>
+                    <a:pt x="2864901" y="1572992"/>
+                  </a:lnTo>
+                  <a:lnTo>
+                    <a:pt x="2936523" y="1846566"/>
+                  </a:lnTo>
+                  <a:lnTo>
+                    <a:pt x="3008146" y="2080971"/>
+                  </a:lnTo>
+                  <a:lnTo>
+                    <a:pt x="3079768" y="2281814"/>
+                  </a:lnTo>
+                  <a:lnTo>
+                    <a:pt x="3151391" y="2453902"/>
+                  </a:lnTo>
+                  <a:lnTo>
+                    <a:pt x="3223013" y="2601351"/>
+                  </a:lnTo>
+                  <a:lnTo>
+                    <a:pt x="3294636" y="2654461"/>
+                  </a:lnTo>
+                  <a:lnTo>
+                    <a:pt x="3366258" y="2654758"/>
+                  </a:lnTo>
+                  <a:lnTo>
+                    <a:pt x="3437881" y="2655055"/>
+                  </a:lnTo>
+                  <a:lnTo>
+                    <a:pt x="3509503" y="2655352"/>
+                  </a:lnTo>
+                  <a:lnTo>
+                    <a:pt x="3581126" y="2655649"/>
+                  </a:lnTo>
+                  <a:lnTo>
+                    <a:pt x="3652748" y="2655946"/>
+                  </a:lnTo>
+                  <a:lnTo>
+                    <a:pt x="3724371" y="2656242"/>
+                  </a:lnTo>
+                  <a:lnTo>
+                    <a:pt x="3795993" y="2656539"/>
+                  </a:lnTo>
+                  <a:lnTo>
+                    <a:pt x="3867616" y="2656835"/>
+                  </a:lnTo>
+                  <a:lnTo>
+                    <a:pt x="3939238" y="2657131"/>
+                  </a:lnTo>
+                  <a:lnTo>
+                    <a:pt x="4010861" y="2657427"/>
+                  </a:lnTo>
+                  <a:lnTo>
+                    <a:pt x="4082483" y="2657723"/>
+                  </a:lnTo>
+                  <a:lnTo>
+                    <a:pt x="4154106" y="2658019"/>
+                  </a:lnTo>
+                  <a:lnTo>
+                    <a:pt x="4225729" y="2658315"/>
+                  </a:lnTo>
+                  <a:lnTo>
+                    <a:pt x="4297351" y="2658611"/>
+                  </a:lnTo>
+                  <a:lnTo>
+                    <a:pt x="4368974" y="2658906"/>
+                  </a:lnTo>
+                  <a:lnTo>
+                    <a:pt x="4440596" y="2659202"/>
+                  </a:lnTo>
+                  <a:lnTo>
+                    <a:pt x="4512219" y="2659497"/>
+                  </a:lnTo>
+                  <a:lnTo>
+                    <a:pt x="4583841" y="2659793"/>
+                  </a:lnTo>
+                  <a:lnTo>
+                    <a:pt x="4655464" y="2660088"/>
+                  </a:lnTo>
+                  <a:lnTo>
+                    <a:pt x="4727086" y="2660383"/>
+                  </a:lnTo>
+                  <a:lnTo>
+                    <a:pt x="4798709" y="2660678"/>
+                  </a:lnTo>
+                  <a:lnTo>
+                    <a:pt x="4870331" y="2660973"/>
+                  </a:lnTo>
+                  <a:lnTo>
+                    <a:pt x="4941954" y="2661268"/>
+                  </a:lnTo>
+                  <a:lnTo>
+                    <a:pt x="5013576" y="2661562"/>
+                  </a:lnTo>
+                  <a:lnTo>
+                    <a:pt x="5085199" y="2661857"/>
+                  </a:lnTo>
+                  <a:lnTo>
+                    <a:pt x="5156821" y="2662151"/>
+                  </a:lnTo>
+                  <a:lnTo>
+                    <a:pt x="5228444" y="2662446"/>
+                  </a:lnTo>
+                  <a:lnTo>
+                    <a:pt x="5300066" y="2662740"/>
+                  </a:lnTo>
+                  <a:lnTo>
+                    <a:pt x="5371689" y="2663034"/>
+                  </a:lnTo>
+                  <a:lnTo>
+                    <a:pt x="5443311" y="2663328"/>
+                  </a:lnTo>
+                  <a:lnTo>
+                    <a:pt x="5514934" y="2663622"/>
+                  </a:lnTo>
+                  <a:lnTo>
+                    <a:pt x="5586557" y="2663916"/>
+                  </a:lnTo>
+                  <a:lnTo>
+                    <a:pt x="5658179" y="2664209"/>
+                  </a:lnTo>
+                  <a:lnTo>
+                    <a:pt x="5729802" y="2664503"/>
+                  </a:lnTo>
+                  <a:lnTo>
+                    <a:pt x="5801424" y="2664797"/>
+                  </a:lnTo>
+                  <a:lnTo>
+                    <a:pt x="5873047" y="2665090"/>
+                  </a:lnTo>
+                  <a:lnTo>
+                    <a:pt x="5944669" y="2665383"/>
+                  </a:lnTo>
+                  <a:lnTo>
+                    <a:pt x="6016292" y="2665676"/>
+                  </a:lnTo>
+                  <a:lnTo>
+                    <a:pt x="6087914" y="2665970"/>
+                  </a:lnTo>
+                  <a:lnTo>
+                    <a:pt x="6159537" y="2666263"/>
+                  </a:lnTo>
+                  <a:lnTo>
+                    <a:pt x="6231159" y="2666555"/>
+                  </a:lnTo>
+                  <a:lnTo>
+                    <a:pt x="6302782" y="2666848"/>
+                  </a:lnTo>
+                  <a:lnTo>
+                    <a:pt x="6374404" y="2667141"/>
+                  </a:lnTo>
+                  <a:lnTo>
+                    <a:pt x="6446027" y="2667433"/>
+                  </a:lnTo>
+                  <a:lnTo>
+                    <a:pt x="6517649" y="2667726"/>
+                  </a:lnTo>
+                  <a:lnTo>
+                    <a:pt x="6589272" y="2668018"/>
+                  </a:lnTo>
+                  <a:lnTo>
+                    <a:pt x="6660894" y="2668310"/>
+                  </a:lnTo>
+                  <a:lnTo>
+                    <a:pt x="6732517" y="2668603"/>
+                  </a:lnTo>
+                  <a:lnTo>
+                    <a:pt x="6804139" y="2668895"/>
+                  </a:lnTo>
+                  <a:lnTo>
+                    <a:pt x="6875762" y="2669187"/>
+                  </a:lnTo>
+                  <a:lnTo>
+                    <a:pt x="6947385" y="2669478"/>
+                  </a:lnTo>
+                  <a:lnTo>
+                    <a:pt x="7019007" y="2669770"/>
+                  </a:lnTo>
+                  <a:lnTo>
+                    <a:pt x="7090630" y="2670062"/>
+                  </a:lnTo>
+                  <a:lnTo>
+                    <a:pt x="7090630" y="3483537"/>
+                  </a:lnTo>
+                  <a:lnTo>
+                    <a:pt x="7019007" y="3483502"/>
+                  </a:lnTo>
+                  <a:lnTo>
+                    <a:pt x="6947385" y="3483461"/>
+                  </a:lnTo>
+                  <a:lnTo>
+                    <a:pt x="6875762" y="3483413"/>
+                  </a:lnTo>
+                  <a:lnTo>
+                    <a:pt x="6804139" y="3483357"/>
+                  </a:lnTo>
+                  <a:lnTo>
+                    <a:pt x="6732517" y="3483292"/>
+                  </a:lnTo>
+                  <a:lnTo>
+                    <a:pt x="6660894" y="3483216"/>
+                  </a:lnTo>
+                  <a:lnTo>
+                    <a:pt x="6589272" y="3483128"/>
+                  </a:lnTo>
+                  <a:lnTo>
+                    <a:pt x="6517649" y="3483024"/>
+                  </a:lnTo>
+                  <a:lnTo>
+                    <a:pt x="6446027" y="3482903"/>
+                  </a:lnTo>
+                  <a:lnTo>
+                    <a:pt x="6374404" y="3482763"/>
+                  </a:lnTo>
+                  <a:lnTo>
+                    <a:pt x="6302782" y="3482598"/>
+                  </a:lnTo>
+                  <a:lnTo>
+                    <a:pt x="6231159" y="3482406"/>
+                  </a:lnTo>
+                  <a:lnTo>
+                    <a:pt x="6159537" y="3482182"/>
+                  </a:lnTo>
+                  <a:lnTo>
+                    <a:pt x="6087914" y="3481921"/>
+                  </a:lnTo>
+                  <a:lnTo>
+                    <a:pt x="6016292" y="3481616"/>
+                  </a:lnTo>
+                  <a:lnTo>
+                    <a:pt x="5944669" y="3481260"/>
+                  </a:lnTo>
+                  <a:lnTo>
+                    <a:pt x="5873047" y="3480845"/>
+                  </a:lnTo>
+                  <a:lnTo>
+                    <a:pt x="5801424" y="3480360"/>
+                  </a:lnTo>
+                  <a:lnTo>
+                    <a:pt x="5729802" y="3479794"/>
+                  </a:lnTo>
+                  <a:lnTo>
+                    <a:pt x="5658179" y="3479133"/>
+                  </a:lnTo>
+                  <a:lnTo>
+                    <a:pt x="5586557" y="3478363"/>
+                  </a:lnTo>
+                  <a:lnTo>
+                    <a:pt x="5514934" y="3477463"/>
+                  </a:lnTo>
+                  <a:lnTo>
+                    <a:pt x="5443311" y="3476413"/>
+                  </a:lnTo>
+                  <a:lnTo>
+                    <a:pt x="5371689" y="3475188"/>
+                  </a:lnTo>
+                  <a:lnTo>
+                    <a:pt x="5300066" y="3473757"/>
+                  </a:lnTo>
+                  <a:lnTo>
+                    <a:pt x="5228444" y="3472088"/>
+                  </a:lnTo>
+                  <a:lnTo>
+                    <a:pt x="5156821" y="3470140"/>
+                  </a:lnTo>
+                  <a:lnTo>
+                    <a:pt x="5085199" y="3467867"/>
+                  </a:lnTo>
+                  <a:lnTo>
+                    <a:pt x="5013576" y="3465213"/>
+                  </a:lnTo>
+                  <a:lnTo>
+                    <a:pt x="4941954" y="3462116"/>
+                  </a:lnTo>
+                  <a:lnTo>
+                    <a:pt x="4870331" y="3458502"/>
+                  </a:lnTo>
+                  <a:lnTo>
+                    <a:pt x="4798709" y="3454283"/>
+                  </a:lnTo>
+                  <a:lnTo>
+                    <a:pt x="4727086" y="3449360"/>
+                  </a:lnTo>
+                  <a:lnTo>
+                    <a:pt x="4655464" y="3443614"/>
+                  </a:lnTo>
+                  <a:lnTo>
+                    <a:pt x="4583841" y="3436908"/>
+                  </a:lnTo>
+                  <a:lnTo>
+                    <a:pt x="4512219" y="3429081"/>
+                  </a:lnTo>
+                  <a:lnTo>
+                    <a:pt x="4440596" y="3419946"/>
+                  </a:lnTo>
+                  <a:lnTo>
+                    <a:pt x="4368974" y="3409285"/>
+                  </a:lnTo>
+                  <a:lnTo>
+                    <a:pt x="4297351" y="3396843"/>
+                  </a:lnTo>
+                  <a:lnTo>
+                    <a:pt x="4225729" y="3382321"/>
+                  </a:lnTo>
+                  <a:lnTo>
+                    <a:pt x="4154106" y="3365373"/>
+                  </a:lnTo>
+                  <a:lnTo>
+                    <a:pt x="4082483" y="3345592"/>
+                  </a:lnTo>
+                  <a:lnTo>
+                    <a:pt x="4010861" y="3322507"/>
+                  </a:lnTo>
+                  <a:lnTo>
+                    <a:pt x="3939238" y="3295563"/>
+                  </a:lnTo>
+                  <a:lnTo>
+                    <a:pt x="3867616" y="3264118"/>
+                  </a:lnTo>
+                  <a:lnTo>
+                    <a:pt x="3795993" y="3227418"/>
+                  </a:lnTo>
+                  <a:lnTo>
+                    <a:pt x="3724371" y="3184585"/>
+                  </a:lnTo>
+                  <a:lnTo>
+                    <a:pt x="3652748" y="3134595"/>
+                  </a:lnTo>
+                  <a:lnTo>
+                    <a:pt x="3581126" y="3076252"/>
+                  </a:lnTo>
+                  <a:lnTo>
+                    <a:pt x="3509503" y="3008159"/>
+                  </a:lnTo>
+                  <a:lnTo>
+                    <a:pt x="3437881" y="2928688"/>
+                  </a:lnTo>
+                  <a:lnTo>
+                    <a:pt x="3366258" y="2835938"/>
+                  </a:lnTo>
+                  <a:lnTo>
+                    <a:pt x="3294636" y="2727689"/>
+                  </a:lnTo>
+                  <a:lnTo>
+                    <a:pt x="3223013" y="2654164"/>
+                  </a:lnTo>
+                  <a:lnTo>
+                    <a:pt x="3151391" y="2653867"/>
+                  </a:lnTo>
+                  <a:lnTo>
+                    <a:pt x="3079768" y="2653569"/>
+                  </a:lnTo>
+                  <a:lnTo>
+                    <a:pt x="3008146" y="2653272"/>
+                  </a:lnTo>
+                  <a:lnTo>
+                    <a:pt x="2936523" y="2652974"/>
+                  </a:lnTo>
+                  <a:lnTo>
+                    <a:pt x="2864901" y="2652676"/>
+                  </a:lnTo>
+                  <a:lnTo>
+                    <a:pt x="2793278" y="2652378"/>
+                  </a:lnTo>
+                  <a:lnTo>
+                    <a:pt x="2721655" y="2652080"/>
+                  </a:lnTo>
+                  <a:lnTo>
+                    <a:pt x="2650033" y="2651782"/>
+                  </a:lnTo>
+                  <a:lnTo>
+                    <a:pt x="2578410" y="2651484"/>
+                  </a:lnTo>
+                  <a:lnTo>
+                    <a:pt x="2506788" y="2651186"/>
+                  </a:lnTo>
+                  <a:lnTo>
+                    <a:pt x="2435165" y="2650888"/>
+                  </a:lnTo>
+                  <a:lnTo>
+                    <a:pt x="2363543" y="2650589"/>
+                  </a:lnTo>
+                  <a:lnTo>
+                    <a:pt x="2291920" y="2650290"/>
+                  </a:lnTo>
+                  <a:lnTo>
+                    <a:pt x="2220298" y="2649992"/>
+                  </a:lnTo>
+                  <a:lnTo>
+                    <a:pt x="2148675" y="2649693"/>
+                  </a:lnTo>
+                  <a:lnTo>
+                    <a:pt x="2077053" y="2649394"/>
+                  </a:lnTo>
+                  <a:lnTo>
+                    <a:pt x="2005430" y="2649095"/>
+                  </a:lnTo>
+                  <a:lnTo>
+                    <a:pt x="1933808" y="2648796"/>
+                  </a:lnTo>
+                  <a:lnTo>
+                    <a:pt x="1862185" y="2648497"/>
+                  </a:lnTo>
+                  <a:lnTo>
+                    <a:pt x="1790563" y="2648197"/>
+                  </a:lnTo>
+                  <a:lnTo>
+                    <a:pt x="1718940" y="2647898"/>
+                  </a:lnTo>
+                  <a:lnTo>
+                    <a:pt x="1647318" y="2647598"/>
+                  </a:lnTo>
+                  <a:lnTo>
+                    <a:pt x="1575695" y="2647299"/>
+                  </a:lnTo>
+                  <a:lnTo>
+                    <a:pt x="1504073" y="2646999"/>
+                  </a:lnTo>
+                  <a:lnTo>
+                    <a:pt x="1432450" y="2646699"/>
+                  </a:lnTo>
+                  <a:lnTo>
+                    <a:pt x="1360827" y="2646399"/>
+                  </a:lnTo>
+                  <a:lnTo>
+                    <a:pt x="1289205" y="2646099"/>
+                  </a:lnTo>
+                  <a:lnTo>
+                    <a:pt x="1217582" y="2645799"/>
+                  </a:lnTo>
+                  <a:lnTo>
+                    <a:pt x="1145960" y="2645498"/>
+                  </a:lnTo>
+                  <a:lnTo>
+                    <a:pt x="1074337" y="2645198"/>
+                  </a:lnTo>
+                  <a:lnTo>
+                    <a:pt x="1002715" y="2644897"/>
+                  </a:lnTo>
+                  <a:lnTo>
+                    <a:pt x="931092" y="2644597"/>
+                  </a:lnTo>
+                  <a:lnTo>
+                    <a:pt x="859470" y="2644296"/>
+                  </a:lnTo>
+                  <a:lnTo>
+                    <a:pt x="787847" y="2643995"/>
+                  </a:lnTo>
+                  <a:lnTo>
+                    <a:pt x="716225" y="2643694"/>
+                  </a:lnTo>
+                  <a:lnTo>
+                    <a:pt x="644602" y="2643393"/>
+                  </a:lnTo>
+                  <a:lnTo>
+                    <a:pt x="572980" y="2643092"/>
+                  </a:lnTo>
+                  <a:lnTo>
+                    <a:pt x="501357" y="2642791"/>
+                  </a:lnTo>
+                  <a:lnTo>
+                    <a:pt x="429735" y="2642489"/>
+                  </a:lnTo>
+                  <a:lnTo>
+                    <a:pt x="358112" y="2642188"/>
+                  </a:lnTo>
+                  <a:lnTo>
+                    <a:pt x="286490" y="2641886"/>
+                  </a:lnTo>
+                  <a:lnTo>
+                    <a:pt x="214867" y="2641584"/>
+                  </a:lnTo>
+                  <a:lnTo>
+                    <a:pt x="143245" y="2641283"/>
+                  </a:lnTo>
+                  <a:lnTo>
+                    <a:pt x="71622" y="2640981"/>
+                  </a:lnTo>
+                  <a:lnTo>
+                    <a:pt x="0" y="2640679"/>
                   </a:lnTo>
                   <a:lnTo>
                     <a:pt x="0" y="0"/>
@@ -4004,207 +4001,204 @@
           </p:nvSpPr>
           <p:spPr>
             <a:xfrm>
-              <a:off x="3736399" y="2073503"/>
-              <a:ext cx="4526280" cy="2670123"/>
+              <a:off x="3759128" y="2073503"/>
+              <a:ext cx="4503550" cy="2670062"/>
             </a:xfrm>
             <a:custGeom>
               <a:avLst/>
               <a:pathLst>
-                <a:path w="4526280" h="2670123">
+                <a:path w="4503550" h="2670062">
                   <a:moveTo>
                     <a:pt x="0" y="0"/>
                   </a:moveTo>
                   <a:lnTo>
-                    <a:pt x="14061" y="110438"/>
-                  </a:lnTo>
-                  <a:lnTo>
-                    <a:pt x="85683" y="592571"/>
-                  </a:lnTo>
-                  <a:lnTo>
-                    <a:pt x="157306" y="1005794"/>
-                  </a:lnTo>
-                  <a:lnTo>
-                    <a:pt x="228928" y="1359957"/>
-                  </a:lnTo>
-                  <a:lnTo>
-                    <a:pt x="300551" y="1663501"/>
-                  </a:lnTo>
-                  <a:lnTo>
-                    <a:pt x="372173" y="1923661"/>
-                  </a:lnTo>
-                  <a:lnTo>
-                    <a:pt x="443796" y="2146638"/>
-                  </a:lnTo>
-                  <a:lnTo>
-                    <a:pt x="515418" y="2337745"/>
-                  </a:lnTo>
-                  <a:lnTo>
-                    <a:pt x="587041" y="2501538"/>
-                  </a:lnTo>
-                  <a:lnTo>
-                    <a:pt x="658663" y="2641921"/>
-                  </a:lnTo>
-                  <a:lnTo>
-                    <a:pt x="730286" y="2654551"/>
-                  </a:lnTo>
-                  <a:lnTo>
-                    <a:pt x="801908" y="2654848"/>
-                  </a:lnTo>
-                  <a:lnTo>
-                    <a:pt x="873531" y="2655144"/>
-                  </a:lnTo>
-                  <a:lnTo>
-                    <a:pt x="945154" y="2655440"/>
-                  </a:lnTo>
-                  <a:lnTo>
-                    <a:pt x="1016776" y="2655737"/>
-                  </a:lnTo>
-                  <a:lnTo>
-                    <a:pt x="1088399" y="2656033"/>
-                  </a:lnTo>
-                  <a:lnTo>
-                    <a:pt x="1160021" y="2656329"/>
-                  </a:lnTo>
-                  <a:lnTo>
-                    <a:pt x="1231644" y="2656625"/>
-                  </a:lnTo>
-                  <a:lnTo>
-                    <a:pt x="1303266" y="2656920"/>
-                  </a:lnTo>
-                  <a:lnTo>
-                    <a:pt x="1374889" y="2657216"/>
-                  </a:lnTo>
-                  <a:lnTo>
-                    <a:pt x="1446511" y="2657512"/>
-                  </a:lnTo>
-                  <a:lnTo>
-                    <a:pt x="1518134" y="2657807"/>
-                  </a:lnTo>
-                  <a:lnTo>
-                    <a:pt x="1589756" y="2658103"/>
-                  </a:lnTo>
-                  <a:lnTo>
-                    <a:pt x="1661379" y="2658398"/>
-                  </a:lnTo>
-                  <a:lnTo>
-                    <a:pt x="1733001" y="2658693"/>
-                  </a:lnTo>
-                  <a:lnTo>
-                    <a:pt x="1804624" y="2658988"/>
-                  </a:lnTo>
-                  <a:lnTo>
-                    <a:pt x="1876246" y="2659283"/>
-                  </a:lnTo>
-                  <a:lnTo>
-                    <a:pt x="1947869" y="2659578"/>
-                  </a:lnTo>
-                  <a:lnTo>
-                    <a:pt x="2019491" y="2659873"/>
-                  </a:lnTo>
-                  <a:lnTo>
-                    <a:pt x="2091114" y="2660167"/>
-                  </a:lnTo>
-                  <a:lnTo>
-                    <a:pt x="2162736" y="2660462"/>
-                  </a:lnTo>
-                  <a:lnTo>
-                    <a:pt x="2234359" y="2660756"/>
-                  </a:lnTo>
-                  <a:lnTo>
-                    <a:pt x="2305982" y="2661051"/>
-                  </a:lnTo>
-                  <a:lnTo>
-                    <a:pt x="2377604" y="2661345"/>
-                  </a:lnTo>
-                  <a:lnTo>
-                    <a:pt x="2449227" y="2661639"/>
-                  </a:lnTo>
-                  <a:lnTo>
-                    <a:pt x="2520849" y="2661933"/>
-                  </a:lnTo>
-                  <a:lnTo>
-                    <a:pt x="2592472" y="2662227"/>
-                  </a:lnTo>
-                  <a:lnTo>
-                    <a:pt x="2664094" y="2662521"/>
-                  </a:lnTo>
-                  <a:lnTo>
-                    <a:pt x="2735717" y="2662815"/>
-                  </a:lnTo>
-                  <a:lnTo>
-                    <a:pt x="2807339" y="2663108"/>
-                  </a:lnTo>
-                  <a:lnTo>
-                    <a:pt x="2878962" y="2663402"/>
-                  </a:lnTo>
-                  <a:lnTo>
-                    <a:pt x="2950584" y="2663695"/>
-                  </a:lnTo>
-                  <a:lnTo>
-                    <a:pt x="3022207" y="2663988"/>
-                  </a:lnTo>
-                  <a:lnTo>
-                    <a:pt x="3093829" y="2664281"/>
-                  </a:lnTo>
-                  <a:lnTo>
-                    <a:pt x="3165452" y="2664574"/>
-                  </a:lnTo>
-                  <a:lnTo>
-                    <a:pt x="3237074" y="2664867"/>
-                  </a:lnTo>
-                  <a:lnTo>
-                    <a:pt x="3308697" y="2665160"/>
-                  </a:lnTo>
-                  <a:lnTo>
-                    <a:pt x="3380319" y="2665453"/>
-                  </a:lnTo>
-                  <a:lnTo>
-                    <a:pt x="3451942" y="2665746"/>
-                  </a:lnTo>
-                  <a:lnTo>
-                    <a:pt x="3523564" y="2666038"/>
-                  </a:lnTo>
-                  <a:lnTo>
-                    <a:pt x="3595187" y="2666331"/>
-                  </a:lnTo>
-                  <a:lnTo>
-                    <a:pt x="3666810" y="2666623"/>
-                  </a:lnTo>
-                  <a:lnTo>
-                    <a:pt x="3738432" y="2666915"/>
-                  </a:lnTo>
-                  <a:lnTo>
-                    <a:pt x="3810055" y="2667207"/>
-                  </a:lnTo>
-                  <a:lnTo>
-                    <a:pt x="3881677" y="2667499"/>
-                  </a:lnTo>
-                  <a:lnTo>
-                    <a:pt x="3953300" y="2667791"/>
-                  </a:lnTo>
-                  <a:lnTo>
-                    <a:pt x="4024922" y="2668083"/>
-                  </a:lnTo>
-                  <a:lnTo>
-                    <a:pt x="4096545" y="2668375"/>
-                  </a:lnTo>
-                  <a:lnTo>
-                    <a:pt x="4168167" y="2668666"/>
-                  </a:lnTo>
-                  <a:lnTo>
-                    <a:pt x="4239790" y="2668958"/>
-                  </a:lnTo>
-                  <a:lnTo>
-                    <a:pt x="4311412" y="2669249"/>
-                  </a:lnTo>
-                  <a:lnTo>
-                    <a:pt x="4383035" y="2669541"/>
-                  </a:lnTo>
-                  <a:lnTo>
-                    <a:pt x="4454657" y="2669832"/>
-                  </a:lnTo>
-                  <a:lnTo>
-                    <a:pt x="4526280" y="2670123"/>
+                    <a:pt x="62954" y="446152"/>
+                  </a:lnTo>
+                  <a:lnTo>
+                    <a:pt x="134576" y="881062"/>
+                  </a:lnTo>
+                  <a:lnTo>
+                    <a:pt x="206199" y="1253704"/>
+                  </a:lnTo>
+                  <a:lnTo>
+                    <a:pt x="277821" y="1572992"/>
+                  </a:lnTo>
+                  <a:lnTo>
+                    <a:pt x="349444" y="1846566"/>
+                  </a:lnTo>
+                  <a:lnTo>
+                    <a:pt x="421066" y="2080971"/>
+                  </a:lnTo>
+                  <a:lnTo>
+                    <a:pt x="492689" y="2281814"/>
+                  </a:lnTo>
+                  <a:lnTo>
+                    <a:pt x="564311" y="2453902"/>
+                  </a:lnTo>
+                  <a:lnTo>
+                    <a:pt x="635934" y="2601351"/>
+                  </a:lnTo>
+                  <a:lnTo>
+                    <a:pt x="707557" y="2654461"/>
+                  </a:lnTo>
+                  <a:lnTo>
+                    <a:pt x="779179" y="2654758"/>
+                  </a:lnTo>
+                  <a:lnTo>
+                    <a:pt x="850802" y="2655055"/>
+                  </a:lnTo>
+                  <a:lnTo>
+                    <a:pt x="922424" y="2655352"/>
+                  </a:lnTo>
+                  <a:lnTo>
+                    <a:pt x="994047" y="2655649"/>
+                  </a:lnTo>
+                  <a:lnTo>
+                    <a:pt x="1065669" y="2655946"/>
+                  </a:lnTo>
+                  <a:lnTo>
+                    <a:pt x="1137292" y="2656242"/>
+                  </a:lnTo>
+                  <a:lnTo>
+                    <a:pt x="1208914" y="2656539"/>
+                  </a:lnTo>
+                  <a:lnTo>
+                    <a:pt x="1280537" y="2656835"/>
+                  </a:lnTo>
+                  <a:lnTo>
+                    <a:pt x="1352159" y="2657131"/>
+                  </a:lnTo>
+                  <a:lnTo>
+                    <a:pt x="1423782" y="2657427"/>
+                  </a:lnTo>
+                  <a:lnTo>
+                    <a:pt x="1495404" y="2657723"/>
+                  </a:lnTo>
+                  <a:lnTo>
+                    <a:pt x="1567027" y="2658019"/>
+                  </a:lnTo>
+                  <a:lnTo>
+                    <a:pt x="1638649" y="2658315"/>
+                  </a:lnTo>
+                  <a:lnTo>
+                    <a:pt x="1710272" y="2658611"/>
+                  </a:lnTo>
+                  <a:lnTo>
+                    <a:pt x="1781894" y="2658906"/>
+                  </a:lnTo>
+                  <a:lnTo>
+                    <a:pt x="1853517" y="2659202"/>
+                  </a:lnTo>
+                  <a:lnTo>
+                    <a:pt x="1925139" y="2659497"/>
+                  </a:lnTo>
+                  <a:lnTo>
+                    <a:pt x="1996762" y="2659793"/>
+                  </a:lnTo>
+                  <a:lnTo>
+                    <a:pt x="2068385" y="2660088"/>
+                  </a:lnTo>
+                  <a:lnTo>
+                    <a:pt x="2140007" y="2660383"/>
+                  </a:lnTo>
+                  <a:lnTo>
+                    <a:pt x="2211630" y="2660678"/>
+                  </a:lnTo>
+                  <a:lnTo>
+                    <a:pt x="2283252" y="2660973"/>
+                  </a:lnTo>
+                  <a:lnTo>
+                    <a:pt x="2354875" y="2661268"/>
+                  </a:lnTo>
+                  <a:lnTo>
+                    <a:pt x="2426497" y="2661562"/>
+                  </a:lnTo>
+                  <a:lnTo>
+                    <a:pt x="2498120" y="2661857"/>
+                  </a:lnTo>
+                  <a:lnTo>
+                    <a:pt x="2569742" y="2662151"/>
+                  </a:lnTo>
+                  <a:lnTo>
+                    <a:pt x="2641365" y="2662446"/>
+                  </a:lnTo>
+                  <a:lnTo>
+                    <a:pt x="2712987" y="2662740"/>
+                  </a:lnTo>
+                  <a:lnTo>
+                    <a:pt x="2784610" y="2663034"/>
+                  </a:lnTo>
+                  <a:lnTo>
+                    <a:pt x="2856232" y="2663328"/>
+                  </a:lnTo>
+                  <a:lnTo>
+                    <a:pt x="2927855" y="2663622"/>
+                  </a:lnTo>
+                  <a:lnTo>
+                    <a:pt x="2999477" y="2663916"/>
+                  </a:lnTo>
+                  <a:lnTo>
+                    <a:pt x="3071100" y="2664209"/>
+                  </a:lnTo>
+                  <a:lnTo>
+                    <a:pt x="3142722" y="2664503"/>
+                  </a:lnTo>
+                  <a:lnTo>
+                    <a:pt x="3214345" y="2664797"/>
+                  </a:lnTo>
+                  <a:lnTo>
+                    <a:pt x="3285967" y="2665090"/>
+                  </a:lnTo>
+                  <a:lnTo>
+                    <a:pt x="3357590" y="2665383"/>
+                  </a:lnTo>
+                  <a:lnTo>
+                    <a:pt x="3429213" y="2665676"/>
+                  </a:lnTo>
+                  <a:lnTo>
+                    <a:pt x="3500835" y="2665970"/>
+                  </a:lnTo>
+                  <a:lnTo>
+                    <a:pt x="3572458" y="2666263"/>
+                  </a:lnTo>
+                  <a:lnTo>
+                    <a:pt x="3644080" y="2666555"/>
+                  </a:lnTo>
+                  <a:lnTo>
+                    <a:pt x="3715703" y="2666848"/>
+                  </a:lnTo>
+                  <a:lnTo>
+                    <a:pt x="3787325" y="2667141"/>
+                  </a:lnTo>
+                  <a:lnTo>
+                    <a:pt x="3858948" y="2667433"/>
+                  </a:lnTo>
+                  <a:lnTo>
+                    <a:pt x="3930570" y="2667726"/>
+                  </a:lnTo>
+                  <a:lnTo>
+                    <a:pt x="4002193" y="2668018"/>
+                  </a:lnTo>
+                  <a:lnTo>
+                    <a:pt x="4073815" y="2668310"/>
+                  </a:lnTo>
+                  <a:lnTo>
+                    <a:pt x="4145438" y="2668603"/>
+                  </a:lnTo>
+                  <a:lnTo>
+                    <a:pt x="4217060" y="2668895"/>
+                  </a:lnTo>
+                  <a:lnTo>
+                    <a:pt x="4288683" y="2669187"/>
+                  </a:lnTo>
+                  <a:lnTo>
+                    <a:pt x="4360305" y="2669478"/>
+                  </a:lnTo>
+                  <a:lnTo>
+                    <a:pt x="4431928" y="2669770"/>
+                  </a:lnTo>
+                  <a:lnTo>
+                    <a:pt x="4503550" y="2670062"/>
                   </a:lnTo>
                 </a:path>
               </a:pathLst>
@@ -4224,309 +4218,309 @@
           </p:nvSpPr>
           <p:spPr>
             <a:xfrm>
-              <a:off x="1172049" y="4714297"/>
-              <a:ext cx="7090630" cy="842748"/>
+              <a:off x="1172049" y="4714182"/>
+              <a:ext cx="7090630" cy="842857"/>
             </a:xfrm>
             <a:custGeom>
               <a:avLst/>
               <a:pathLst>
-                <a:path w="7090630" h="842748">
+                <a:path w="7090630" h="842857">
                   <a:moveTo>
-                    <a:pt x="7090630" y="842748"/>
+                    <a:pt x="7090630" y="842857"/>
                   </a:moveTo>
                   <a:lnTo>
-                    <a:pt x="7019007" y="842714"/>
-                  </a:lnTo>
-                  <a:lnTo>
-                    <a:pt x="6947385" y="842675"/>
-                  </a:lnTo>
-                  <a:lnTo>
-                    <a:pt x="6875762" y="842629"/>
-                  </a:lnTo>
-                  <a:lnTo>
-                    <a:pt x="6804139" y="842575"/>
-                  </a:lnTo>
-                  <a:lnTo>
-                    <a:pt x="6732517" y="842512"/>
-                  </a:lnTo>
-                  <a:lnTo>
-                    <a:pt x="6660894" y="842438"/>
-                  </a:lnTo>
-                  <a:lnTo>
-                    <a:pt x="6589272" y="842353"/>
-                  </a:lnTo>
-                  <a:lnTo>
-                    <a:pt x="6517649" y="842253"/>
-                  </a:lnTo>
-                  <a:lnTo>
-                    <a:pt x="6446027" y="842137"/>
-                  </a:lnTo>
-                  <a:lnTo>
-                    <a:pt x="6374404" y="842001"/>
-                  </a:lnTo>
-                  <a:lnTo>
-                    <a:pt x="6302782" y="841842"/>
-                  </a:lnTo>
-                  <a:lnTo>
-                    <a:pt x="6231159" y="841657"/>
-                  </a:lnTo>
-                  <a:lnTo>
-                    <a:pt x="6159537" y="841441"/>
-                  </a:lnTo>
-                  <a:lnTo>
-                    <a:pt x="6087914" y="841190"/>
-                  </a:lnTo>
-                  <a:lnTo>
-                    <a:pt x="6016292" y="840896"/>
-                  </a:lnTo>
-                  <a:lnTo>
-                    <a:pt x="5944669" y="840553"/>
-                  </a:lnTo>
-                  <a:lnTo>
-                    <a:pt x="5873047" y="840153"/>
-                  </a:lnTo>
-                  <a:lnTo>
-                    <a:pt x="5801424" y="839686"/>
-                  </a:lnTo>
-                  <a:lnTo>
-                    <a:pt x="5729802" y="839142"/>
-                  </a:lnTo>
-                  <a:lnTo>
-                    <a:pt x="5658179" y="838507"/>
-                  </a:lnTo>
-                  <a:lnTo>
-                    <a:pt x="5586557" y="837765"/>
-                  </a:lnTo>
-                  <a:lnTo>
-                    <a:pt x="5514934" y="836901"/>
-                  </a:lnTo>
-                  <a:lnTo>
-                    <a:pt x="5443311" y="835892"/>
-                  </a:lnTo>
-                  <a:lnTo>
-                    <a:pt x="5371689" y="834714"/>
-                  </a:lnTo>
-                  <a:lnTo>
-                    <a:pt x="5300066" y="833341"/>
-                  </a:lnTo>
-                  <a:lnTo>
-                    <a:pt x="5228444" y="831738"/>
-                  </a:lnTo>
-                  <a:lnTo>
-                    <a:pt x="5156821" y="829868"/>
-                  </a:lnTo>
-                  <a:lnTo>
-                    <a:pt x="5085199" y="827686"/>
-                  </a:lnTo>
-                  <a:lnTo>
-                    <a:pt x="5013576" y="825141"/>
-                  </a:lnTo>
-                  <a:lnTo>
-                    <a:pt x="4941954" y="822171"/>
-                  </a:lnTo>
-                  <a:lnTo>
-                    <a:pt x="4870331" y="818705"/>
-                  </a:lnTo>
-                  <a:lnTo>
-                    <a:pt x="4798709" y="814662"/>
-                  </a:lnTo>
-                  <a:lnTo>
-                    <a:pt x="4727086" y="809944"/>
-                  </a:lnTo>
-                  <a:lnTo>
-                    <a:pt x="4655464" y="804440"/>
-                  </a:lnTo>
-                  <a:lnTo>
-                    <a:pt x="4583841" y="798018"/>
-                  </a:lnTo>
-                  <a:lnTo>
-                    <a:pt x="4512219" y="790525"/>
-                  </a:lnTo>
-                  <a:lnTo>
-                    <a:pt x="4440596" y="781782"/>
-                  </a:lnTo>
-                  <a:lnTo>
-                    <a:pt x="4368974" y="771581"/>
-                  </a:lnTo>
-                  <a:lnTo>
-                    <a:pt x="4297351" y="759679"/>
-                  </a:lnTo>
-                  <a:lnTo>
-                    <a:pt x="4225729" y="745793"/>
-                  </a:lnTo>
-                  <a:lnTo>
-                    <a:pt x="4154106" y="729591"/>
-                  </a:lnTo>
-                  <a:lnTo>
-                    <a:pt x="4082483" y="710687"/>
-                  </a:lnTo>
-                  <a:lnTo>
-                    <a:pt x="4010861" y="688630"/>
-                  </a:lnTo>
-                  <a:lnTo>
-                    <a:pt x="3939238" y="662896"/>
-                  </a:lnTo>
-                  <a:lnTo>
-                    <a:pt x="3867616" y="632870"/>
-                  </a:lnTo>
-                  <a:lnTo>
-                    <a:pt x="3795993" y="597837"/>
-                  </a:lnTo>
-                  <a:lnTo>
-                    <a:pt x="3724371" y="556961"/>
-                  </a:lnTo>
-                  <a:lnTo>
-                    <a:pt x="3652748" y="509269"/>
-                  </a:lnTo>
-                  <a:lnTo>
-                    <a:pt x="3581126" y="453625"/>
-                  </a:lnTo>
-                  <a:lnTo>
-                    <a:pt x="3509503" y="388700"/>
-                  </a:lnTo>
-                  <a:lnTo>
-                    <a:pt x="3437881" y="312950"/>
-                  </a:lnTo>
-                  <a:lnTo>
-                    <a:pt x="3366258" y="224566"/>
-                  </a:lnTo>
-                  <a:lnTo>
-                    <a:pt x="3294636" y="121444"/>
-                  </a:lnTo>
-                  <a:lnTo>
-                    <a:pt x="3223013" y="13459"/>
-                  </a:lnTo>
-                  <a:lnTo>
-                    <a:pt x="3151391" y="13163"/>
-                  </a:lnTo>
-                  <a:lnTo>
-                    <a:pt x="3079768" y="12866"/>
-                  </a:lnTo>
-                  <a:lnTo>
-                    <a:pt x="3008146" y="12569"/>
-                  </a:lnTo>
-                  <a:lnTo>
-                    <a:pt x="2936523" y="12272"/>
-                  </a:lnTo>
-                  <a:lnTo>
-                    <a:pt x="2864901" y="11975"/>
-                  </a:lnTo>
-                  <a:lnTo>
-                    <a:pt x="2793278" y="11677"/>
-                  </a:lnTo>
-                  <a:lnTo>
-                    <a:pt x="2721655" y="11380"/>
-                  </a:lnTo>
-                  <a:lnTo>
-                    <a:pt x="2650033" y="11082"/>
-                  </a:lnTo>
-                  <a:lnTo>
-                    <a:pt x="2578410" y="10785"/>
-                  </a:lnTo>
-                  <a:lnTo>
-                    <a:pt x="2506788" y="10487"/>
-                  </a:lnTo>
-                  <a:lnTo>
-                    <a:pt x="2435165" y="10189"/>
-                  </a:lnTo>
-                  <a:lnTo>
-                    <a:pt x="2363543" y="9891"/>
-                  </a:lnTo>
-                  <a:lnTo>
-                    <a:pt x="2291920" y="9593"/>
-                  </a:lnTo>
-                  <a:lnTo>
-                    <a:pt x="2220298" y="9295"/>
-                  </a:lnTo>
-                  <a:lnTo>
-                    <a:pt x="2148675" y="8997"/>
-                  </a:lnTo>
-                  <a:lnTo>
-                    <a:pt x="2077053" y="8699"/>
-                  </a:lnTo>
-                  <a:lnTo>
-                    <a:pt x="2005430" y="8400"/>
-                  </a:lnTo>
-                  <a:lnTo>
-                    <a:pt x="1933808" y="8101"/>
-                  </a:lnTo>
-                  <a:lnTo>
-                    <a:pt x="1862185" y="7803"/>
-                  </a:lnTo>
-                  <a:lnTo>
-                    <a:pt x="1790563" y="7504"/>
-                  </a:lnTo>
-                  <a:lnTo>
-                    <a:pt x="1718940" y="7205"/>
-                  </a:lnTo>
-                  <a:lnTo>
-                    <a:pt x="1647318" y="6906"/>
-                  </a:lnTo>
-                  <a:lnTo>
-                    <a:pt x="1575695" y="6607"/>
-                  </a:lnTo>
-                  <a:lnTo>
-                    <a:pt x="1504073" y="6308"/>
-                  </a:lnTo>
-                  <a:lnTo>
-                    <a:pt x="1432450" y="6008"/>
-                  </a:lnTo>
-                  <a:lnTo>
-                    <a:pt x="1360827" y="5709"/>
-                  </a:lnTo>
-                  <a:lnTo>
-                    <a:pt x="1289205" y="5410"/>
-                  </a:lnTo>
-                  <a:lnTo>
-                    <a:pt x="1217582" y="5110"/>
-                  </a:lnTo>
-                  <a:lnTo>
-                    <a:pt x="1145960" y="4810"/>
-                  </a:lnTo>
-                  <a:lnTo>
-                    <a:pt x="1074337" y="4510"/>
-                  </a:lnTo>
-                  <a:lnTo>
-                    <a:pt x="1002715" y="4210"/>
-                  </a:lnTo>
-                  <a:lnTo>
-                    <a:pt x="931092" y="3910"/>
-                  </a:lnTo>
-                  <a:lnTo>
-                    <a:pt x="859470" y="3610"/>
-                  </a:lnTo>
-                  <a:lnTo>
-                    <a:pt x="787847" y="3310"/>
-                  </a:lnTo>
-                  <a:lnTo>
-                    <a:pt x="716225" y="3009"/>
-                  </a:lnTo>
-                  <a:lnTo>
-                    <a:pt x="644602" y="2709"/>
-                  </a:lnTo>
-                  <a:lnTo>
-                    <a:pt x="572980" y="2408"/>
-                  </a:lnTo>
-                  <a:lnTo>
-                    <a:pt x="501357" y="2108"/>
-                  </a:lnTo>
-                  <a:lnTo>
-                    <a:pt x="429735" y="1807"/>
-                  </a:lnTo>
-                  <a:lnTo>
-                    <a:pt x="358112" y="1506"/>
-                  </a:lnTo>
-                  <a:lnTo>
-                    <a:pt x="286490" y="1205"/>
-                  </a:lnTo>
-                  <a:lnTo>
-                    <a:pt x="214867" y="904"/>
-                  </a:lnTo>
-                  <a:lnTo>
-                    <a:pt x="143245" y="602"/>
-                  </a:lnTo>
-                  <a:lnTo>
-                    <a:pt x="71622" y="301"/>
+                    <a:pt x="7019007" y="842822"/>
+                  </a:lnTo>
+                  <a:lnTo>
+                    <a:pt x="6947385" y="842782"/>
+                  </a:lnTo>
+                  <a:lnTo>
+                    <a:pt x="6875762" y="842734"/>
+                  </a:lnTo>
+                  <a:lnTo>
+                    <a:pt x="6804139" y="842678"/>
+                  </a:lnTo>
+                  <a:lnTo>
+                    <a:pt x="6732517" y="842613"/>
+                  </a:lnTo>
+                  <a:lnTo>
+                    <a:pt x="6660894" y="842537"/>
+                  </a:lnTo>
+                  <a:lnTo>
+                    <a:pt x="6589272" y="842448"/>
+                  </a:lnTo>
+                  <a:lnTo>
+                    <a:pt x="6517649" y="842345"/>
+                  </a:lnTo>
+                  <a:lnTo>
+                    <a:pt x="6446027" y="842224"/>
+                  </a:lnTo>
+                  <a:lnTo>
+                    <a:pt x="6374404" y="842084"/>
+                  </a:lnTo>
+                  <a:lnTo>
+                    <a:pt x="6302782" y="841919"/>
+                  </a:lnTo>
+                  <a:lnTo>
+                    <a:pt x="6231159" y="841727"/>
+                  </a:lnTo>
+                  <a:lnTo>
+                    <a:pt x="6159537" y="841503"/>
+                  </a:lnTo>
+                  <a:lnTo>
+                    <a:pt x="6087914" y="841242"/>
+                  </a:lnTo>
+                  <a:lnTo>
+                    <a:pt x="6016292" y="840937"/>
+                  </a:lnTo>
+                  <a:lnTo>
+                    <a:pt x="5944669" y="840581"/>
+                  </a:lnTo>
+                  <a:lnTo>
+                    <a:pt x="5873047" y="840166"/>
+                  </a:lnTo>
+                  <a:lnTo>
+                    <a:pt x="5801424" y="839681"/>
+                  </a:lnTo>
+                  <a:lnTo>
+                    <a:pt x="5729802" y="839115"/>
+                  </a:lnTo>
+                  <a:lnTo>
+                    <a:pt x="5658179" y="838454"/>
+                  </a:lnTo>
+                  <a:lnTo>
+                    <a:pt x="5586557" y="837683"/>
+                  </a:lnTo>
+                  <a:lnTo>
+                    <a:pt x="5514934" y="836784"/>
+                  </a:lnTo>
+                  <a:lnTo>
+                    <a:pt x="5443311" y="835734"/>
+                  </a:lnTo>
+                  <a:lnTo>
+                    <a:pt x="5371689" y="834508"/>
+                  </a:lnTo>
+                  <a:lnTo>
+                    <a:pt x="5300066" y="833078"/>
+                  </a:lnTo>
+                  <a:lnTo>
+                    <a:pt x="5228444" y="831409"/>
+                  </a:lnTo>
+                  <a:lnTo>
+                    <a:pt x="5156821" y="829461"/>
+                  </a:lnTo>
+                  <a:lnTo>
+                    <a:pt x="5085199" y="827187"/>
+                  </a:lnTo>
+                  <a:lnTo>
+                    <a:pt x="5013576" y="824534"/>
+                  </a:lnTo>
+                  <a:lnTo>
+                    <a:pt x="4941954" y="821437"/>
+                  </a:lnTo>
+                  <a:lnTo>
+                    <a:pt x="4870331" y="817822"/>
+                  </a:lnTo>
+                  <a:lnTo>
+                    <a:pt x="4798709" y="813604"/>
+                  </a:lnTo>
+                  <a:lnTo>
+                    <a:pt x="4727086" y="808681"/>
+                  </a:lnTo>
+                  <a:lnTo>
+                    <a:pt x="4655464" y="802935"/>
+                  </a:lnTo>
+                  <a:lnTo>
+                    <a:pt x="4583841" y="796229"/>
+                  </a:lnTo>
+                  <a:lnTo>
+                    <a:pt x="4512219" y="788402"/>
+                  </a:lnTo>
+                  <a:lnTo>
+                    <a:pt x="4440596" y="779267"/>
+                  </a:lnTo>
+                  <a:lnTo>
+                    <a:pt x="4368974" y="768606"/>
+                  </a:lnTo>
+                  <a:lnTo>
+                    <a:pt x="4297351" y="756164"/>
+                  </a:lnTo>
+                  <a:lnTo>
+                    <a:pt x="4225729" y="741642"/>
+                  </a:lnTo>
+                  <a:lnTo>
+                    <a:pt x="4154106" y="724694"/>
+                  </a:lnTo>
+                  <a:lnTo>
+                    <a:pt x="4082483" y="704913"/>
+                  </a:lnTo>
+                  <a:lnTo>
+                    <a:pt x="4010861" y="681828"/>
+                  </a:lnTo>
+                  <a:lnTo>
+                    <a:pt x="3939238" y="654884"/>
+                  </a:lnTo>
+                  <a:lnTo>
+                    <a:pt x="3867616" y="623439"/>
+                  </a:lnTo>
+                  <a:lnTo>
+                    <a:pt x="3795993" y="586739"/>
+                  </a:lnTo>
+                  <a:lnTo>
+                    <a:pt x="3724371" y="543906"/>
+                  </a:lnTo>
+                  <a:lnTo>
+                    <a:pt x="3652748" y="493916"/>
+                  </a:lnTo>
+                  <a:lnTo>
+                    <a:pt x="3581126" y="435573"/>
+                  </a:lnTo>
+                  <a:lnTo>
+                    <a:pt x="3509503" y="367480"/>
+                  </a:lnTo>
+                  <a:lnTo>
+                    <a:pt x="3437881" y="288009"/>
+                  </a:lnTo>
+                  <a:lnTo>
+                    <a:pt x="3366258" y="195259"/>
+                  </a:lnTo>
+                  <a:lnTo>
+                    <a:pt x="3294636" y="87010"/>
+                  </a:lnTo>
+                  <a:lnTo>
+                    <a:pt x="3223013" y="13485"/>
+                  </a:lnTo>
+                  <a:lnTo>
+                    <a:pt x="3151391" y="13187"/>
+                  </a:lnTo>
+                  <a:lnTo>
+                    <a:pt x="3079768" y="12890"/>
+                  </a:lnTo>
+                  <a:lnTo>
+                    <a:pt x="3008146" y="12592"/>
+                  </a:lnTo>
+                  <a:lnTo>
+                    <a:pt x="2936523" y="12295"/>
+                  </a:lnTo>
+                  <a:lnTo>
+                    <a:pt x="2864901" y="11997"/>
+                  </a:lnTo>
+                  <a:lnTo>
+                    <a:pt x="2793278" y="11699"/>
+                  </a:lnTo>
+                  <a:lnTo>
+                    <a:pt x="2721655" y="11401"/>
+                  </a:lnTo>
+                  <a:lnTo>
+                    <a:pt x="2650033" y="11103"/>
+                  </a:lnTo>
+                  <a:lnTo>
+                    <a:pt x="2578410" y="10805"/>
+                  </a:lnTo>
+                  <a:lnTo>
+                    <a:pt x="2506788" y="10507"/>
+                  </a:lnTo>
+                  <a:lnTo>
+                    <a:pt x="2435165" y="10208"/>
+                  </a:lnTo>
+                  <a:lnTo>
+                    <a:pt x="2363543" y="9910"/>
+                  </a:lnTo>
+                  <a:lnTo>
+                    <a:pt x="2291920" y="9611"/>
+                  </a:lnTo>
+                  <a:lnTo>
+                    <a:pt x="2220298" y="9313"/>
+                  </a:lnTo>
+                  <a:lnTo>
+                    <a:pt x="2148675" y="9014"/>
+                  </a:lnTo>
+                  <a:lnTo>
+                    <a:pt x="2077053" y="8715"/>
+                  </a:lnTo>
+                  <a:lnTo>
+                    <a:pt x="2005430" y="8416"/>
+                  </a:lnTo>
+                  <a:lnTo>
+                    <a:pt x="1933808" y="8117"/>
+                  </a:lnTo>
+                  <a:lnTo>
+                    <a:pt x="1862185" y="7817"/>
+                  </a:lnTo>
+                  <a:lnTo>
+                    <a:pt x="1790563" y="7518"/>
+                  </a:lnTo>
+                  <a:lnTo>
+                    <a:pt x="1718940" y="7219"/>
+                  </a:lnTo>
+                  <a:lnTo>
+                    <a:pt x="1647318" y="6919"/>
+                  </a:lnTo>
+                  <a:lnTo>
+                    <a:pt x="1575695" y="6619"/>
+                  </a:lnTo>
+                  <a:lnTo>
+                    <a:pt x="1504073" y="6320"/>
+                  </a:lnTo>
+                  <a:lnTo>
+                    <a:pt x="1432450" y="6020"/>
+                  </a:lnTo>
+                  <a:lnTo>
+                    <a:pt x="1360827" y="5720"/>
+                  </a:lnTo>
+                  <a:lnTo>
+                    <a:pt x="1289205" y="5420"/>
+                  </a:lnTo>
+                  <a:lnTo>
+                    <a:pt x="1217582" y="5120"/>
+                  </a:lnTo>
+                  <a:lnTo>
+                    <a:pt x="1145960" y="4819"/>
+                  </a:lnTo>
+                  <a:lnTo>
+                    <a:pt x="1074337" y="4519"/>
+                  </a:lnTo>
+                  <a:lnTo>
+                    <a:pt x="1002715" y="4218"/>
+                  </a:lnTo>
+                  <a:lnTo>
+                    <a:pt x="931092" y="3918"/>
+                  </a:lnTo>
+                  <a:lnTo>
+                    <a:pt x="859470" y="3617"/>
+                  </a:lnTo>
+                  <a:lnTo>
+                    <a:pt x="787847" y="3316"/>
+                  </a:lnTo>
+                  <a:lnTo>
+                    <a:pt x="716225" y="3015"/>
+                  </a:lnTo>
+                  <a:lnTo>
+                    <a:pt x="644602" y="2714"/>
+                  </a:lnTo>
+                  <a:lnTo>
+                    <a:pt x="572980" y="2413"/>
+                  </a:lnTo>
+                  <a:lnTo>
+                    <a:pt x="501357" y="2112"/>
+                  </a:lnTo>
+                  <a:lnTo>
+                    <a:pt x="429735" y="1810"/>
+                  </a:lnTo>
+                  <a:lnTo>
+                    <a:pt x="358112" y="1509"/>
+                  </a:lnTo>
+                  <a:lnTo>
+                    <a:pt x="286490" y="1207"/>
+                  </a:lnTo>
+                  <a:lnTo>
+                    <a:pt x="214867" y="905"/>
+                  </a:lnTo>
+                  <a:lnTo>
+                    <a:pt x="143245" y="603"/>
+                  </a:lnTo>
+                  <a:lnTo>
+                    <a:pt x="71622" y="302"/>
                   </a:lnTo>
                   <a:lnTo>
                     <a:pt x="0" y="0"/>
@@ -4549,234 +4543,234 @@
           </p:nvSpPr>
           <p:spPr>
             <a:xfrm>
-              <a:off x="3072840" y="2073503"/>
-              <a:ext cx="5189838" cy="3470884"/>
+              <a:off x="3096779" y="2073503"/>
+              <a:ext cx="5165900" cy="3470681"/>
             </a:xfrm>
             <a:custGeom>
               <a:avLst/>
               <a:pathLst>
-                <a:path w="5189838" h="3470884">
+                <a:path w="5165900" h="3470681">
                   <a:moveTo>
                     <a:pt x="0" y="0"/>
                   </a:moveTo>
                   <a:lnTo>
-                    <a:pt x="33016" y="124443"/>
-                  </a:lnTo>
-                  <a:lnTo>
-                    <a:pt x="104639" y="374317"/>
-                  </a:lnTo>
-                  <a:lnTo>
-                    <a:pt x="176261" y="605604"/>
-                  </a:lnTo>
-                  <a:lnTo>
-                    <a:pt x="247884" y="819687"/>
-                  </a:lnTo>
-                  <a:lnTo>
-                    <a:pt x="319506" y="1017847"/>
-                  </a:lnTo>
-                  <a:lnTo>
-                    <a:pt x="391129" y="1201266"/>
-                  </a:lnTo>
-                  <a:lnTo>
-                    <a:pt x="462751" y="1371043"/>
-                  </a:lnTo>
-                  <a:lnTo>
-                    <a:pt x="534374" y="1528191"/>
-                  </a:lnTo>
-                  <a:lnTo>
-                    <a:pt x="605996" y="1673650"/>
-                  </a:lnTo>
-                  <a:lnTo>
-                    <a:pt x="677619" y="1808290"/>
-                  </a:lnTo>
-                  <a:lnTo>
-                    <a:pt x="749241" y="1932914"/>
-                  </a:lnTo>
-                  <a:lnTo>
-                    <a:pt x="820864" y="2048269"/>
-                  </a:lnTo>
-                  <a:lnTo>
-                    <a:pt x="892487" y="2155044"/>
-                  </a:lnTo>
-                  <a:lnTo>
-                    <a:pt x="964109" y="2253876"/>
-                  </a:lnTo>
-                  <a:lnTo>
-                    <a:pt x="1035732" y="2345357"/>
-                  </a:lnTo>
-                  <a:lnTo>
-                    <a:pt x="1107354" y="2430033"/>
-                  </a:lnTo>
-                  <a:lnTo>
-                    <a:pt x="1178977" y="2508411"/>
-                  </a:lnTo>
-                  <a:lnTo>
-                    <a:pt x="1250599" y="2580959"/>
-                  </a:lnTo>
-                  <a:lnTo>
-                    <a:pt x="1322222" y="2648110"/>
-                  </a:lnTo>
-                  <a:lnTo>
-                    <a:pt x="1393844" y="2710267"/>
-                  </a:lnTo>
-                  <a:lnTo>
-                    <a:pt x="1465467" y="2767800"/>
-                  </a:lnTo>
-                  <a:lnTo>
-                    <a:pt x="1537089" y="2821054"/>
-                  </a:lnTo>
-                  <a:lnTo>
-                    <a:pt x="1608712" y="2870347"/>
-                  </a:lnTo>
-                  <a:lnTo>
-                    <a:pt x="1680334" y="2915973"/>
-                  </a:lnTo>
-                  <a:lnTo>
-                    <a:pt x="1751957" y="2958206"/>
-                  </a:lnTo>
-                  <a:lnTo>
-                    <a:pt x="1823579" y="2997297"/>
-                  </a:lnTo>
-                  <a:lnTo>
-                    <a:pt x="1895202" y="3033480"/>
-                  </a:lnTo>
-                  <a:lnTo>
-                    <a:pt x="1966824" y="3066972"/>
-                  </a:lnTo>
-                  <a:lnTo>
-                    <a:pt x="2038447" y="3097973"/>
-                  </a:lnTo>
-                  <a:lnTo>
-                    <a:pt x="2110069" y="3126667"/>
-                  </a:lnTo>
-                  <a:lnTo>
-                    <a:pt x="2181692" y="3153228"/>
-                  </a:lnTo>
-                  <a:lnTo>
-                    <a:pt x="2253315" y="3177813"/>
-                  </a:lnTo>
-                  <a:lnTo>
-                    <a:pt x="2324937" y="3200569"/>
-                  </a:lnTo>
-                  <a:lnTo>
-                    <a:pt x="2396560" y="3221632"/>
-                  </a:lnTo>
-                  <a:lnTo>
-                    <a:pt x="2468182" y="3241129"/>
-                  </a:lnTo>
-                  <a:lnTo>
-                    <a:pt x="2539805" y="3259175"/>
-                  </a:lnTo>
-                  <a:lnTo>
-                    <a:pt x="2611427" y="3275880"/>
-                  </a:lnTo>
-                  <a:lnTo>
-                    <a:pt x="2683050" y="3291341"/>
-                  </a:lnTo>
-                  <a:lnTo>
-                    <a:pt x="2754672" y="3305653"/>
-                  </a:lnTo>
-                  <a:lnTo>
-                    <a:pt x="2826295" y="3318900"/>
-                  </a:lnTo>
-                  <a:lnTo>
-                    <a:pt x="2897917" y="3331162"/>
-                  </a:lnTo>
-                  <a:lnTo>
-                    <a:pt x="2969540" y="3342511"/>
-                  </a:lnTo>
-                  <a:lnTo>
-                    <a:pt x="3041162" y="3353017"/>
-                  </a:lnTo>
-                  <a:lnTo>
-                    <a:pt x="3112785" y="3362741"/>
-                  </a:lnTo>
-                  <a:lnTo>
-                    <a:pt x="3184407" y="3371741"/>
-                  </a:lnTo>
-                  <a:lnTo>
-                    <a:pt x="3256030" y="3380073"/>
-                  </a:lnTo>
-                  <a:lnTo>
-                    <a:pt x="3327652" y="3387784"/>
-                  </a:lnTo>
-                  <a:lnTo>
-                    <a:pt x="3399275" y="3394922"/>
-                  </a:lnTo>
-                  <a:lnTo>
-                    <a:pt x="3470897" y="3401529"/>
-                  </a:lnTo>
-                  <a:lnTo>
-                    <a:pt x="3542520" y="3407645"/>
-                  </a:lnTo>
-                  <a:lnTo>
-                    <a:pt x="3614143" y="3413305"/>
-                  </a:lnTo>
-                  <a:lnTo>
-                    <a:pt x="3685765" y="3418545"/>
-                  </a:lnTo>
-                  <a:lnTo>
-                    <a:pt x="3757388" y="3423395"/>
-                  </a:lnTo>
-                  <a:lnTo>
-                    <a:pt x="3829010" y="3427884"/>
-                  </a:lnTo>
-                  <a:lnTo>
-                    <a:pt x="3900633" y="3432039"/>
-                  </a:lnTo>
-                  <a:lnTo>
-                    <a:pt x="3972255" y="3435885"/>
-                  </a:lnTo>
-                  <a:lnTo>
-                    <a:pt x="4043878" y="3439445"/>
-                  </a:lnTo>
-                  <a:lnTo>
-                    <a:pt x="4115500" y="3442740"/>
-                  </a:lnTo>
-                  <a:lnTo>
-                    <a:pt x="4187123" y="3445791"/>
-                  </a:lnTo>
-                  <a:lnTo>
-                    <a:pt x="4258745" y="3448614"/>
-                  </a:lnTo>
-                  <a:lnTo>
-                    <a:pt x="4330368" y="3451227"/>
-                  </a:lnTo>
-                  <a:lnTo>
-                    <a:pt x="4401990" y="3453646"/>
-                  </a:lnTo>
-                  <a:lnTo>
-                    <a:pt x="4473613" y="3455885"/>
-                  </a:lnTo>
-                  <a:lnTo>
-                    <a:pt x="4545235" y="3457957"/>
-                  </a:lnTo>
-                  <a:lnTo>
-                    <a:pt x="4616858" y="3459876"/>
-                  </a:lnTo>
-                  <a:lnTo>
-                    <a:pt x="4688480" y="3461651"/>
-                  </a:lnTo>
-                  <a:lnTo>
-                    <a:pt x="4760103" y="3463295"/>
-                  </a:lnTo>
-                  <a:lnTo>
-                    <a:pt x="4831725" y="3464816"/>
-                  </a:lnTo>
-                  <a:lnTo>
-                    <a:pt x="4903348" y="3466224"/>
-                  </a:lnTo>
-                  <a:lnTo>
-                    <a:pt x="4974971" y="3467527"/>
-                  </a:lnTo>
-                  <a:lnTo>
-                    <a:pt x="5046593" y="3468734"/>
-                  </a:lnTo>
-                  <a:lnTo>
-                    <a:pt x="5118216" y="3469850"/>
-                  </a:lnTo>
-                  <a:lnTo>
-                    <a:pt x="5189838" y="3470884"/>
+                    <a:pt x="9078" y="35194"/>
+                  </a:lnTo>
+                  <a:lnTo>
+                    <a:pt x="80700" y="292173"/>
+                  </a:lnTo>
+                  <a:lnTo>
+                    <a:pt x="152323" y="530002"/>
+                  </a:lnTo>
+                  <a:lnTo>
+                    <a:pt x="223945" y="750109"/>
+                  </a:lnTo>
+                  <a:lnTo>
+                    <a:pt x="295568" y="953814"/>
+                  </a:lnTo>
+                  <a:lnTo>
+                    <a:pt x="367190" y="1142339"/>
+                  </a:lnTo>
+                  <a:lnTo>
+                    <a:pt x="438813" y="1316816"/>
+                  </a:lnTo>
+                  <a:lnTo>
+                    <a:pt x="510435" y="1478291"/>
+                  </a:lnTo>
+                  <a:lnTo>
+                    <a:pt x="582058" y="1627733"/>
+                  </a:lnTo>
+                  <a:lnTo>
+                    <a:pt x="653680" y="1766039"/>
+                  </a:lnTo>
+                  <a:lnTo>
+                    <a:pt x="725303" y="1894039"/>
+                  </a:lnTo>
+                  <a:lnTo>
+                    <a:pt x="796925" y="2012501"/>
+                  </a:lnTo>
+                  <a:lnTo>
+                    <a:pt x="868548" y="2122135"/>
+                  </a:lnTo>
+                  <a:lnTo>
+                    <a:pt x="940171" y="2223599"/>
+                  </a:lnTo>
+                  <a:lnTo>
+                    <a:pt x="1011793" y="2317503"/>
+                  </a:lnTo>
+                  <a:lnTo>
+                    <a:pt x="1083416" y="2404409"/>
+                  </a:lnTo>
+                  <a:lnTo>
+                    <a:pt x="1155038" y="2484839"/>
+                  </a:lnTo>
+                  <a:lnTo>
+                    <a:pt x="1226661" y="2559275"/>
+                  </a:lnTo>
+                  <a:lnTo>
+                    <a:pt x="1298283" y="2628165"/>
+                  </a:lnTo>
+                  <a:lnTo>
+                    <a:pt x="1369906" y="2691921"/>
+                  </a:lnTo>
+                  <a:lnTo>
+                    <a:pt x="1441528" y="2750926"/>
+                  </a:lnTo>
+                  <a:lnTo>
+                    <a:pt x="1513151" y="2805534"/>
+                  </a:lnTo>
+                  <a:lnTo>
+                    <a:pt x="1584773" y="2856073"/>
+                  </a:lnTo>
+                  <a:lnTo>
+                    <a:pt x="1656396" y="2902846"/>
+                  </a:lnTo>
+                  <a:lnTo>
+                    <a:pt x="1728018" y="2946134"/>
+                  </a:lnTo>
+                  <a:lnTo>
+                    <a:pt x="1799641" y="2986195"/>
+                  </a:lnTo>
+                  <a:lnTo>
+                    <a:pt x="1871263" y="3023272"/>
+                  </a:lnTo>
+                  <a:lnTo>
+                    <a:pt x="1942886" y="3057585"/>
+                  </a:lnTo>
+                  <a:lnTo>
+                    <a:pt x="2014508" y="3089342"/>
+                  </a:lnTo>
+                  <a:lnTo>
+                    <a:pt x="2086131" y="3118732"/>
+                  </a:lnTo>
+                  <a:lnTo>
+                    <a:pt x="2157753" y="3145932"/>
+                  </a:lnTo>
+                  <a:lnTo>
+                    <a:pt x="2229376" y="3171105"/>
+                  </a:lnTo>
+                  <a:lnTo>
+                    <a:pt x="2300999" y="3194403"/>
+                  </a:lnTo>
+                  <a:lnTo>
+                    <a:pt x="2372621" y="3215964"/>
+                  </a:lnTo>
+                  <a:lnTo>
+                    <a:pt x="2444244" y="3235919"/>
+                  </a:lnTo>
+                  <a:lnTo>
+                    <a:pt x="2515866" y="3254386"/>
+                  </a:lnTo>
+                  <a:lnTo>
+                    <a:pt x="2587489" y="3271478"/>
+                  </a:lnTo>
+                  <a:lnTo>
+                    <a:pt x="2659111" y="3287295"/>
+                  </a:lnTo>
+                  <a:lnTo>
+                    <a:pt x="2730734" y="3301935"/>
+                  </a:lnTo>
+                  <a:lnTo>
+                    <a:pt x="2802356" y="3315483"/>
+                  </a:lnTo>
+                  <a:lnTo>
+                    <a:pt x="2873979" y="3328021"/>
+                  </a:lnTo>
+                  <a:lnTo>
+                    <a:pt x="2945601" y="3339626"/>
+                  </a:lnTo>
+                  <a:lnTo>
+                    <a:pt x="3017224" y="3350365"/>
+                  </a:lnTo>
+                  <a:lnTo>
+                    <a:pt x="3088846" y="3360305"/>
+                  </a:lnTo>
+                  <a:lnTo>
+                    <a:pt x="3160469" y="3369503"/>
+                  </a:lnTo>
+                  <a:lnTo>
+                    <a:pt x="3232091" y="3378016"/>
+                  </a:lnTo>
+                  <a:lnTo>
+                    <a:pt x="3303714" y="3385895"/>
+                  </a:lnTo>
+                  <a:lnTo>
+                    <a:pt x="3375336" y="3393187"/>
+                  </a:lnTo>
+                  <a:lnTo>
+                    <a:pt x="3446959" y="3399935"/>
+                  </a:lnTo>
+                  <a:lnTo>
+                    <a:pt x="3518581" y="3406181"/>
+                  </a:lnTo>
+                  <a:lnTo>
+                    <a:pt x="3590204" y="3411961"/>
+                  </a:lnTo>
+                  <a:lnTo>
+                    <a:pt x="3661827" y="3417310"/>
+                  </a:lnTo>
+                  <a:lnTo>
+                    <a:pt x="3733449" y="3422261"/>
+                  </a:lnTo>
+                  <a:lnTo>
+                    <a:pt x="3805072" y="3426842"/>
+                  </a:lnTo>
+                  <a:lnTo>
+                    <a:pt x="3876694" y="3431083"/>
+                  </a:lnTo>
+                  <a:lnTo>
+                    <a:pt x="3948317" y="3435007"/>
+                  </a:lnTo>
+                  <a:lnTo>
+                    <a:pt x="4019939" y="3438639"/>
+                  </a:lnTo>
+                  <a:lnTo>
+                    <a:pt x="4091562" y="3442000"/>
+                  </a:lnTo>
+                  <a:lnTo>
+                    <a:pt x="4163184" y="3445111"/>
+                  </a:lnTo>
+                  <a:lnTo>
+                    <a:pt x="4234807" y="3447990"/>
+                  </a:lnTo>
+                  <a:lnTo>
+                    <a:pt x="4306429" y="3450655"/>
+                  </a:lnTo>
+                  <a:lnTo>
+                    <a:pt x="4378052" y="3453121"/>
+                  </a:lnTo>
+                  <a:lnTo>
+                    <a:pt x="4449674" y="3455403"/>
+                  </a:lnTo>
+                  <a:lnTo>
+                    <a:pt x="4521297" y="3457515"/>
+                  </a:lnTo>
+                  <a:lnTo>
+                    <a:pt x="4592919" y="3459470"/>
+                  </a:lnTo>
+                  <a:lnTo>
+                    <a:pt x="4664542" y="3461279"/>
+                  </a:lnTo>
+                  <a:lnTo>
+                    <a:pt x="4736164" y="3462953"/>
+                  </a:lnTo>
+                  <a:lnTo>
+                    <a:pt x="4807787" y="3464502"/>
+                  </a:lnTo>
+                  <a:lnTo>
+                    <a:pt x="4879409" y="3465936"/>
+                  </a:lnTo>
+                  <a:lnTo>
+                    <a:pt x="4951032" y="3467264"/>
+                  </a:lnTo>
+                  <a:lnTo>
+                    <a:pt x="5022655" y="3468492"/>
+                  </a:lnTo>
+                  <a:lnTo>
+                    <a:pt x="5094277" y="3469629"/>
+                  </a:lnTo>
+                  <a:lnTo>
+                    <a:pt x="5165900" y="3470681"/>
                   </a:lnTo>
                 </a:path>
               </a:pathLst>
@@ -4848,7 +4842,7 @@
           </p:nvSpPr>
           <p:spPr>
             <a:xfrm>
-              <a:off x="4401933" y="2073503"/>
+              <a:off x="4423736" y="2073503"/>
               <a:ext cx="0" cy="3649639"/>
             </a:xfrm>
             <a:custGeom>
@@ -4891,7 +4885,7 @@
           </p:nvSpPr>
           <p:spPr>
             <a:xfrm>
-              <a:off x="3507589" y="2073503"/>
+              <a:off x="3470882" y="2073503"/>
               <a:ext cx="0" cy="3649639"/>
             </a:xfrm>
             <a:custGeom>
@@ -4934,7 +4928,7 @@
           </p:nvSpPr>
           <p:spPr>
             <a:xfrm>
-              <a:off x="5433405" y="2073503"/>
+              <a:off x="5437283" y="2073503"/>
               <a:ext cx="0" cy="3649639"/>
             </a:xfrm>
             <a:custGeom>
@@ -5207,7 +5201,7 @@
           </p:nvSpPr>
           <p:spPr>
             <a:xfrm>
-              <a:off x="842324" y="5785772"/>
+              <a:off x="843419" y="5785772"/>
               <a:ext cx="161574" cy="80101"/>
             </a:xfrm>
             <a:prstGeom prst="rect">
@@ -5253,7 +5247,7 @@
           </p:nvSpPr>
           <p:spPr>
             <a:xfrm>
-              <a:off x="1681960" y="5785772"/>
+              <a:off x="1681469" y="5785772"/>
               <a:ext cx="161574" cy="80101"/>
             </a:xfrm>
             <a:prstGeom prst="rect">
@@ -5299,7 +5293,7 @@
           </p:nvSpPr>
           <p:spPr>
             <a:xfrm>
-              <a:off x="2521596" y="5785772"/>
+              <a:off x="2519520" y="5785772"/>
               <a:ext cx="161574" cy="80101"/>
             </a:xfrm>
             <a:prstGeom prst="rect">
@@ -5345,7 +5339,7 @@
           </p:nvSpPr>
           <p:spPr>
             <a:xfrm>
-              <a:off x="3361232" y="5785772"/>
+              <a:off x="3357571" y="5785772"/>
               <a:ext cx="161574" cy="80101"/>
             </a:xfrm>
             <a:prstGeom prst="rect">
@@ -5391,7 +5385,7 @@
           </p:nvSpPr>
           <p:spPr>
             <a:xfrm>
-              <a:off x="4200868" y="5785772"/>
+              <a:off x="4195621" y="5785772"/>
               <a:ext cx="161574" cy="80101"/>
             </a:xfrm>
             <a:prstGeom prst="rect">
@@ -5437,7 +5431,7 @@
           </p:nvSpPr>
           <p:spPr>
             <a:xfrm>
-              <a:off x="5090202" y="5785772"/>
+              <a:off x="5083370" y="5785772"/>
               <a:ext cx="62179" cy="80101"/>
             </a:xfrm>
             <a:prstGeom prst="rect">
@@ -5483,7 +5477,7 @@
           </p:nvSpPr>
           <p:spPr>
             <a:xfrm>
-              <a:off x="5898749" y="5785772"/>
+              <a:off x="5890331" y="5785772"/>
               <a:ext cx="124358" cy="80101"/>
             </a:xfrm>
             <a:prstGeom prst="rect">
@@ -5529,7 +5523,7 @@
           </p:nvSpPr>
           <p:spPr>
             <a:xfrm>
-              <a:off x="6738385" y="5785772"/>
+              <a:off x="6728381" y="5785772"/>
               <a:ext cx="124358" cy="80101"/>
             </a:xfrm>
             <a:prstGeom prst="rect">
@@ -5575,7 +5569,7 @@
           </p:nvSpPr>
           <p:spPr>
             <a:xfrm>
-              <a:off x="7578021" y="5785772"/>
+              <a:off x="7566432" y="5785772"/>
               <a:ext cx="124358" cy="80101"/>
             </a:xfrm>
             <a:prstGeom prst="rect">
@@ -5621,7 +5615,7 @@
           </p:nvSpPr>
           <p:spPr>
             <a:xfrm>
-              <a:off x="8417657" y="5785772"/>
+              <a:off x="8404483" y="5785772"/>
               <a:ext cx="124358" cy="80101"/>
             </a:xfrm>
             <a:prstGeom prst="rect">
@@ -5792,7 +5786,7 @@
                   <a:latin typeface="Helvetica"/>
                   <a:cs typeface="Helvetica"/>
                 </a:rPr>
-                <a:t>subHR per 10 % decline: 2.47 (1.00-6.10), p_Bonf = 0.294 (n = 6)  |  per IQR decline (Δ = 22.9 %): 7.99 (1.01-63.25)  |  IQR: [-19.2, 3.7] %</a:t>
+                <a:t>subHR per 10 % decline: 2.47 (1.00-6.10), p_Bonf = 0.294 (n = 6)  |  per IQR decline (Δ = 23.5 %): 8.38 (1.01-69.58)  |  IQR: [-19.6, 3.9] %</a:t>
               </a:r>
             </a:p>
           </p:txBody>
